--- a/ゲーム科3年/00_前期/オンラインゲームプログラミングⅠ/05_チャットプログラム(CS).pptx
+++ b/ゲーム科3年/00_前期/オンラインゲームプログラミングⅠ/05_チャットプログラム(CS).pptx
@@ -7,11 +7,8 @@
   <p:sldIdLst>
     <p:sldId id="256" r:id="rId2"/>
     <p:sldId id="257" r:id="rId3"/>
-    <p:sldId id="258" r:id="rId4"/>
-    <p:sldId id="259" r:id="rId5"/>
-    <p:sldId id="260" r:id="rId6"/>
-    <p:sldId id="261" r:id="rId7"/>
-    <p:sldId id="262" r:id="rId8"/>
+    <p:sldId id="259" r:id="rId4"/>
+    <p:sldId id="258" r:id="rId5"/>
   </p:sldIdLst>
   <p:sldSz cx="12192000" cy="6858000"/>
   <p:notesSz cx="6858000" cy="9144000"/>
@@ -265,7 +262,7 @@
           <a:p>
             <a:fld id="{E9CC885B-4903-4D54-9A93-00025F12DED9}" type="datetimeFigureOut">
               <a:rPr kumimoji="1" lang="ja-JP" altLang="en-US" smtClean="0"/>
-              <a:t>2025/10/8</a:t>
+              <a:t>2025/10/9</a:t>
             </a:fld>
             <a:endParaRPr kumimoji="1" lang="ja-JP" altLang="en-US"/>
           </a:p>
@@ -495,7 +492,7 @@
           <a:p>
             <a:fld id="{E9CC885B-4903-4D54-9A93-00025F12DED9}" type="datetimeFigureOut">
               <a:rPr kumimoji="1" lang="ja-JP" altLang="en-US" smtClean="0"/>
-              <a:t>2025/10/8</a:t>
+              <a:t>2025/10/9</a:t>
             </a:fld>
             <a:endParaRPr kumimoji="1" lang="ja-JP" altLang="en-US"/>
           </a:p>
@@ -735,7 +732,7 @@
           <a:p>
             <a:fld id="{E9CC885B-4903-4D54-9A93-00025F12DED9}" type="datetimeFigureOut">
               <a:rPr kumimoji="1" lang="ja-JP" altLang="en-US" smtClean="0"/>
-              <a:t>2025/10/8</a:t>
+              <a:t>2025/10/9</a:t>
             </a:fld>
             <a:endParaRPr kumimoji="1" lang="ja-JP" altLang="en-US"/>
           </a:p>
@@ -965,7 +962,7 @@
           <a:p>
             <a:fld id="{E9CC885B-4903-4D54-9A93-00025F12DED9}" type="datetimeFigureOut">
               <a:rPr kumimoji="1" lang="ja-JP" altLang="en-US" smtClean="0"/>
-              <a:t>2025/10/8</a:t>
+              <a:t>2025/10/9</a:t>
             </a:fld>
             <a:endParaRPr kumimoji="1" lang="ja-JP" altLang="en-US"/>
           </a:p>
@@ -1240,7 +1237,7 @@
           <a:p>
             <a:fld id="{E9CC885B-4903-4D54-9A93-00025F12DED9}" type="datetimeFigureOut">
               <a:rPr kumimoji="1" lang="ja-JP" altLang="en-US" smtClean="0"/>
-              <a:t>2025/10/8</a:t>
+              <a:t>2025/10/9</a:t>
             </a:fld>
             <a:endParaRPr kumimoji="1" lang="ja-JP" altLang="en-US"/>
           </a:p>
@@ -1569,7 +1566,7 @@
           <a:p>
             <a:fld id="{E9CC885B-4903-4D54-9A93-00025F12DED9}" type="datetimeFigureOut">
               <a:rPr kumimoji="1" lang="ja-JP" altLang="en-US" smtClean="0"/>
-              <a:t>2025/10/8</a:t>
+              <a:t>2025/10/9</a:t>
             </a:fld>
             <a:endParaRPr kumimoji="1" lang="ja-JP" altLang="en-US"/>
           </a:p>
@@ -2045,7 +2042,7 @@
           <a:p>
             <a:fld id="{E9CC885B-4903-4D54-9A93-00025F12DED9}" type="datetimeFigureOut">
               <a:rPr kumimoji="1" lang="ja-JP" altLang="en-US" smtClean="0"/>
-              <a:t>2025/10/8</a:t>
+              <a:t>2025/10/9</a:t>
             </a:fld>
             <a:endParaRPr kumimoji="1" lang="ja-JP" altLang="en-US"/>
           </a:p>
@@ -2186,7 +2183,7 @@
           <a:p>
             <a:fld id="{E9CC885B-4903-4D54-9A93-00025F12DED9}" type="datetimeFigureOut">
               <a:rPr kumimoji="1" lang="ja-JP" altLang="en-US" smtClean="0"/>
-              <a:t>2025/10/8</a:t>
+              <a:t>2025/10/9</a:t>
             </a:fld>
             <a:endParaRPr kumimoji="1" lang="ja-JP" altLang="en-US"/>
           </a:p>
@@ -2299,7 +2296,7 @@
           <a:p>
             <a:fld id="{E9CC885B-4903-4D54-9A93-00025F12DED9}" type="datetimeFigureOut">
               <a:rPr kumimoji="1" lang="ja-JP" altLang="en-US" smtClean="0"/>
-              <a:t>2025/10/8</a:t>
+              <a:t>2025/10/9</a:t>
             </a:fld>
             <a:endParaRPr kumimoji="1" lang="ja-JP" altLang="en-US"/>
           </a:p>
@@ -2642,7 +2639,7 @@
           <a:p>
             <a:fld id="{E9CC885B-4903-4D54-9A93-00025F12DED9}" type="datetimeFigureOut">
               <a:rPr kumimoji="1" lang="ja-JP" altLang="en-US" smtClean="0"/>
-              <a:t>2025/10/8</a:t>
+              <a:t>2025/10/9</a:t>
             </a:fld>
             <a:endParaRPr kumimoji="1" lang="ja-JP" altLang="en-US"/>
           </a:p>
@@ -2930,7 +2927,7 @@
           <a:p>
             <a:fld id="{E9CC885B-4903-4D54-9A93-00025F12DED9}" type="datetimeFigureOut">
               <a:rPr kumimoji="1" lang="ja-JP" altLang="en-US" smtClean="0"/>
-              <a:t>2025/10/8</a:t>
+              <a:t>2025/10/9</a:t>
             </a:fld>
             <a:endParaRPr kumimoji="1" lang="ja-JP" altLang="en-US"/>
           </a:p>
@@ -3203,7 +3200,7 @@
           <a:p>
             <a:fld id="{E9CC885B-4903-4D54-9A93-00025F12DED9}" type="datetimeFigureOut">
               <a:rPr kumimoji="1" lang="ja-JP" altLang="en-US" smtClean="0"/>
-              <a:t>2025/10/8</a:t>
+              <a:t>2025/10/9</a:t>
             </a:fld>
             <a:endParaRPr kumimoji="1" lang="ja-JP" altLang="en-US"/>
           </a:p>
@@ -3635,7 +3632,7 @@
         <p:spPr>
           <a:xfrm>
             <a:off x="567542" y="491954"/>
-            <a:ext cx="1826141" cy="584775"/>
+            <a:ext cx="4774064" cy="584775"/>
           </a:xfrm>
           <a:prstGeom prst="rect">
             <a:avLst/>
@@ -3650,8 +3647,13 @@
           <a:p>
             <a:r>
               <a:rPr kumimoji="1" lang="ja-JP" altLang="en-US" sz="3200" b="1" u="sng" dirty="0"/>
-              <a:t>通信方式</a:t>
-            </a:r>
+              <a:t>チャットプログラム</a:t>
+            </a:r>
+            <a:r>
+              <a:rPr kumimoji="1" lang="en-US" altLang="ja-JP" sz="3200" b="1" u="sng" dirty="0"/>
+              <a:t>(CS)</a:t>
+            </a:r>
+            <a:endParaRPr kumimoji="1" lang="ja-JP" altLang="en-US" sz="3200" b="1" u="sng" dirty="0"/>
           </a:p>
         </p:txBody>
       </p:sp>
@@ -3670,7 +3672,7 @@
         <p:spPr>
           <a:xfrm>
             <a:off x="567542" y="1216429"/>
-            <a:ext cx="9417963" cy="1938992"/>
+            <a:ext cx="9110186" cy="461665"/>
           </a:xfrm>
           <a:prstGeom prst="rect">
             <a:avLst/>
@@ -3685,69 +3687,267 @@
           <a:p>
             <a:r>
               <a:rPr kumimoji="1" lang="ja-JP" altLang="en-US" sz="2400" dirty="0"/>
-              <a:t>データ通信は、</a:t>
-            </a:r>
-            <a:r>
-              <a:rPr kumimoji="1" lang="ja-JP" altLang="en-US" sz="2400" b="1" dirty="0">
-                <a:solidFill>
-                  <a:srgbClr val="FF0000"/>
-                </a:solidFill>
-              </a:rPr>
-              <a:t>ユーザーに必要なデータが渡らないといけません。</a:t>
-            </a:r>
-            <a:endParaRPr kumimoji="1" lang="en-US" altLang="ja-JP" sz="2400" b="1" dirty="0">
-              <a:solidFill>
-                <a:srgbClr val="FF0000"/>
-              </a:solidFill>
-            </a:endParaRPr>
-          </a:p>
-          <a:p>
-            <a:r>
-              <a:rPr lang="ja-JP" altLang="en-US" sz="2400" dirty="0"/>
-              <a:t>ゲームでは</a:t>
-            </a:r>
-            <a:r>
-              <a:rPr lang="ja-JP" altLang="en-US" sz="2400" b="1" dirty="0">
-                <a:solidFill>
-                  <a:srgbClr val="FF0000"/>
-                </a:solidFill>
-              </a:rPr>
-              <a:t>ユーザーはクライアントを操作</a:t>
-            </a:r>
-            <a:r>
-              <a:rPr lang="ja-JP" altLang="en-US" sz="2400" dirty="0"/>
-              <a:t>しますので、</a:t>
-            </a:r>
-            <a:endParaRPr lang="en-US" altLang="ja-JP" sz="2400" dirty="0"/>
-          </a:p>
-          <a:p>
-            <a:r>
-              <a:rPr kumimoji="1" lang="ja-JP" altLang="en-US" sz="2400" dirty="0"/>
-              <a:t>ゲームの情報をクライアントに伝えなくてはいけません。</a:t>
+              <a:t>クライアントサーバー方式でチャットプログラムを練習します。</a:t>
             </a:r>
             <a:endParaRPr kumimoji="1" lang="en-US" altLang="ja-JP" sz="2400" dirty="0"/>
           </a:p>
-          <a:p>
-            <a:endParaRPr lang="en-US" altLang="ja-JP" sz="2400" dirty="0"/>
-          </a:p>
-          <a:p>
-            <a:r>
-              <a:rPr kumimoji="1" lang="en-US" altLang="ja-JP" sz="2400" dirty="0"/>
-              <a:t>※</a:t>
-            </a:r>
-            <a:r>
-              <a:rPr kumimoji="1" lang="ja-JP" altLang="en-US" sz="2400" dirty="0"/>
-              <a:t>「</a:t>
-            </a:r>
-            <a:r>
-              <a:rPr kumimoji="1" lang="en-US" altLang="ja-JP" sz="2400" dirty="0"/>
-              <a:t>00_</a:t>
-            </a:r>
-            <a:r>
-              <a:rPr kumimoji="1" lang="ja-JP" altLang="en-US" sz="2400" dirty="0"/>
-              <a:t>オンラインゲームの仕組み」を見直してみよう</a:t>
-            </a:r>
-            <a:endParaRPr kumimoji="1" lang="en-US" altLang="ja-JP" sz="2400" dirty="0"/>
+        </p:txBody>
+      </p:sp>
+      <p:pic>
+        <p:nvPicPr>
+          <p:cNvPr id="3" name="図 2">
+            <a:extLst>
+              <a:ext uri="{FF2B5EF4-FFF2-40B4-BE49-F238E27FC236}">
+                <a16:creationId xmlns:a16="http://schemas.microsoft.com/office/drawing/2014/main" id="{F867DA63-2830-4FE1-B909-B53650B5CAF7}"/>
+              </a:ext>
+            </a:extLst>
+          </p:cNvPr>
+          <p:cNvPicPr>
+            <a:picLocks noChangeAspect="1"/>
+          </p:cNvPicPr>
+          <p:nvPr/>
+        </p:nvPicPr>
+        <p:blipFill>
+          <a:blip r:embed="rId2"/>
+          <a:stretch>
+            <a:fillRect/>
+          </a:stretch>
+        </p:blipFill>
+        <p:spPr>
+          <a:xfrm>
+            <a:off x="567542" y="1678094"/>
+            <a:ext cx="1588245" cy="1351977"/>
+          </a:xfrm>
+          <a:prstGeom prst="rect">
+            <a:avLst/>
+          </a:prstGeom>
+        </p:spPr>
+      </p:pic>
+      <p:pic>
+        <p:nvPicPr>
+          <p:cNvPr id="7" name="図 6">
+            <a:extLst>
+              <a:ext uri="{FF2B5EF4-FFF2-40B4-BE49-F238E27FC236}">
+                <a16:creationId xmlns:a16="http://schemas.microsoft.com/office/drawing/2014/main" id="{0E8BCDAB-E0B5-46C8-B2AB-53509C15F844}"/>
+              </a:ext>
+            </a:extLst>
+          </p:cNvPr>
+          <p:cNvPicPr>
+            <a:picLocks noChangeAspect="1"/>
+          </p:cNvPicPr>
+          <p:nvPr/>
+        </p:nvPicPr>
+        <p:blipFill>
+          <a:blip r:embed="rId2"/>
+          <a:stretch>
+            <a:fillRect/>
+          </a:stretch>
+        </p:blipFill>
+        <p:spPr>
+          <a:xfrm>
+            <a:off x="567542" y="3293576"/>
+            <a:ext cx="1588244" cy="1351976"/>
+          </a:xfrm>
+          <a:prstGeom prst="rect">
+            <a:avLst/>
+          </a:prstGeom>
+        </p:spPr>
+      </p:pic>
+      <p:pic>
+        <p:nvPicPr>
+          <p:cNvPr id="8" name="図 7">
+            <a:extLst>
+              <a:ext uri="{FF2B5EF4-FFF2-40B4-BE49-F238E27FC236}">
+                <a16:creationId xmlns:a16="http://schemas.microsoft.com/office/drawing/2014/main" id="{20F8A654-22E5-456A-BAAD-557092F58D1B}"/>
+              </a:ext>
+            </a:extLst>
+          </p:cNvPr>
+          <p:cNvPicPr>
+            <a:picLocks noChangeAspect="1"/>
+          </p:cNvPicPr>
+          <p:nvPr/>
+        </p:nvPicPr>
+        <p:blipFill>
+          <a:blip r:embed="rId2"/>
+          <a:stretch>
+            <a:fillRect/>
+          </a:stretch>
+        </p:blipFill>
+        <p:spPr>
+          <a:xfrm>
+            <a:off x="567542" y="5179906"/>
+            <a:ext cx="1588244" cy="1351976"/>
+          </a:xfrm>
+          <a:prstGeom prst="rect">
+            <a:avLst/>
+          </a:prstGeom>
+        </p:spPr>
+      </p:pic>
+      <p:pic>
+        <p:nvPicPr>
+          <p:cNvPr id="9" name="図 8">
+            <a:extLst>
+              <a:ext uri="{FF2B5EF4-FFF2-40B4-BE49-F238E27FC236}">
+                <a16:creationId xmlns:a16="http://schemas.microsoft.com/office/drawing/2014/main" id="{52F8CC78-BA5D-4E48-B4D1-A52C7E46EF55}"/>
+              </a:ext>
+            </a:extLst>
+          </p:cNvPr>
+          <p:cNvPicPr>
+            <a:picLocks noChangeAspect="1"/>
+          </p:cNvPicPr>
+          <p:nvPr/>
+        </p:nvPicPr>
+        <p:blipFill>
+          <a:blip r:embed="rId3"/>
+          <a:stretch>
+            <a:fillRect/>
+          </a:stretch>
+        </p:blipFill>
+        <p:spPr>
+          <a:xfrm>
+            <a:off x="5411392" y="2507981"/>
+            <a:ext cx="3000794" cy="2505425"/>
+          </a:xfrm>
+          <a:prstGeom prst="rect">
+            <a:avLst/>
+          </a:prstGeom>
+        </p:spPr>
+      </p:pic>
+      <p:sp>
+        <p:nvSpPr>
+          <p:cNvPr id="10" name="矢印: 左右 9">
+            <a:extLst>
+              <a:ext uri="{FF2B5EF4-FFF2-40B4-BE49-F238E27FC236}">
+                <a16:creationId xmlns:a16="http://schemas.microsoft.com/office/drawing/2014/main" id="{9A8FC2C3-AE8B-408A-B9E0-93D5A53371A8}"/>
+              </a:ext>
+            </a:extLst>
+          </p:cNvPr>
+          <p:cNvSpPr/>
+          <p:nvPr/>
+        </p:nvSpPr>
+        <p:spPr>
+          <a:xfrm rot="1287548">
+            <a:off x="2590498" y="2230380"/>
+            <a:ext cx="2372777" cy="618565"/>
+          </a:xfrm>
+          <a:prstGeom prst="leftRightArrow">
+            <a:avLst/>
+          </a:prstGeom>
+        </p:spPr>
+        <p:style>
+          <a:lnRef idx="2">
+            <a:schemeClr val="accent1">
+              <a:shade val="50000"/>
+            </a:schemeClr>
+          </a:lnRef>
+          <a:fillRef idx="1">
+            <a:schemeClr val="accent1"/>
+          </a:fillRef>
+          <a:effectRef idx="0">
+            <a:schemeClr val="accent1"/>
+          </a:effectRef>
+          <a:fontRef idx="minor">
+            <a:schemeClr val="lt1"/>
+          </a:fontRef>
+        </p:style>
+        <p:txBody>
+          <a:bodyPr rtlCol="0" anchor="ctr"/>
+          <a:lstStyle/>
+          <a:p>
+            <a:pPr algn="ctr"/>
+            <a:endParaRPr kumimoji="1" lang="ja-JP" altLang="en-US"/>
+          </a:p>
+        </p:txBody>
+      </p:sp>
+      <p:sp>
+        <p:nvSpPr>
+          <p:cNvPr id="11" name="矢印: 左右 10">
+            <a:extLst>
+              <a:ext uri="{FF2B5EF4-FFF2-40B4-BE49-F238E27FC236}">
+                <a16:creationId xmlns:a16="http://schemas.microsoft.com/office/drawing/2014/main" id="{F577DA21-B86F-4272-9981-7BEA9E655C1E}"/>
+              </a:ext>
+            </a:extLst>
+          </p:cNvPr>
+          <p:cNvSpPr/>
+          <p:nvPr/>
+        </p:nvSpPr>
+        <p:spPr>
+          <a:xfrm>
+            <a:off x="2559592" y="3660281"/>
+            <a:ext cx="2372777" cy="618565"/>
+          </a:xfrm>
+          <a:prstGeom prst="leftRightArrow">
+            <a:avLst/>
+          </a:prstGeom>
+        </p:spPr>
+        <p:style>
+          <a:lnRef idx="2">
+            <a:schemeClr val="accent1">
+              <a:shade val="50000"/>
+            </a:schemeClr>
+          </a:lnRef>
+          <a:fillRef idx="1">
+            <a:schemeClr val="accent1"/>
+          </a:fillRef>
+          <a:effectRef idx="0">
+            <a:schemeClr val="accent1"/>
+          </a:effectRef>
+          <a:fontRef idx="minor">
+            <a:schemeClr val="lt1"/>
+          </a:fontRef>
+        </p:style>
+        <p:txBody>
+          <a:bodyPr rtlCol="0" anchor="ctr"/>
+          <a:lstStyle/>
+          <a:p>
+            <a:pPr algn="ctr"/>
+            <a:endParaRPr kumimoji="1" lang="ja-JP" altLang="en-US"/>
+          </a:p>
+        </p:txBody>
+      </p:sp>
+      <p:sp>
+        <p:nvSpPr>
+          <p:cNvPr id="12" name="矢印: 左右 11">
+            <a:extLst>
+              <a:ext uri="{FF2B5EF4-FFF2-40B4-BE49-F238E27FC236}">
+                <a16:creationId xmlns:a16="http://schemas.microsoft.com/office/drawing/2014/main" id="{15EDC236-68E2-4B74-95A9-C16623FEE2AC}"/>
+              </a:ext>
+            </a:extLst>
+          </p:cNvPr>
+          <p:cNvSpPr/>
+          <p:nvPr/>
+        </p:nvSpPr>
+        <p:spPr>
+          <a:xfrm rot="19784611">
+            <a:off x="2553819" y="5191824"/>
+            <a:ext cx="2372777" cy="618565"/>
+          </a:xfrm>
+          <a:prstGeom prst="leftRightArrow">
+            <a:avLst/>
+          </a:prstGeom>
+        </p:spPr>
+        <p:style>
+          <a:lnRef idx="2">
+            <a:schemeClr val="accent1">
+              <a:shade val="50000"/>
+            </a:schemeClr>
+          </a:lnRef>
+          <a:fillRef idx="1">
+            <a:schemeClr val="accent1"/>
+          </a:fillRef>
+          <a:effectRef idx="0">
+            <a:schemeClr val="accent1"/>
+          </a:effectRef>
+          <a:fontRef idx="minor">
+            <a:schemeClr val="lt1"/>
+          </a:fontRef>
+        </p:style>
+        <p:txBody>
+          <a:bodyPr rtlCol="0" anchor="ctr"/>
+          <a:lstStyle/>
+          <a:p>
+            <a:pPr algn="ctr"/>
+            <a:endParaRPr kumimoji="1" lang="ja-JP" altLang="en-US"/>
           </a:p>
         </p:txBody>
       </p:sp>
@@ -3796,7 +3996,7 @@
         <p:spPr>
           <a:xfrm>
             <a:off x="567542" y="491954"/>
-            <a:ext cx="1826141" cy="584775"/>
+            <a:ext cx="5711820" cy="584775"/>
           </a:xfrm>
           <a:prstGeom prst="rect">
             <a:avLst/>
@@ -3811,7 +4011,15 @@
           <a:p>
             <a:r>
               <a:rPr kumimoji="1" lang="ja-JP" altLang="en-US" sz="3200" b="1" u="sng" dirty="0"/>
-              <a:t>通信方式</a:t>
+              <a:t>チャットプログラム</a:t>
+            </a:r>
+            <a:r>
+              <a:rPr kumimoji="1" lang="en-US" altLang="ja-JP" sz="3200" b="1" u="sng" dirty="0"/>
+              <a:t>(CS) </a:t>
+            </a:r>
+            <a:r>
+              <a:rPr kumimoji="1" lang="ja-JP" altLang="en-US" sz="3200" b="1" u="sng" dirty="0"/>
+              <a:t>復習</a:t>
             </a:r>
           </a:p>
         </p:txBody>
@@ -3831,7 +4039,7 @@
         <p:spPr>
           <a:xfrm>
             <a:off x="567542" y="1216429"/>
-            <a:ext cx="11128367" cy="2677656"/>
+            <a:ext cx="6955750" cy="1200329"/>
           </a:xfrm>
           <a:prstGeom prst="rect">
             <a:avLst/>
@@ -3846,1210 +4054,21 @@
           <a:p>
             <a:r>
               <a:rPr kumimoji="1" lang="ja-JP" altLang="en-US" sz="2400" dirty="0"/>
-              <a:t>クライアント間でデータを通信、共有する方法は大きく分けて</a:t>
-            </a:r>
-            <a:r>
-              <a:rPr kumimoji="1" lang="en-US" altLang="ja-JP" sz="2400" dirty="0"/>
-              <a:t>2</a:t>
-            </a:r>
+              <a:t>クライアントサーバーは、</a:t>
+            </a:r>
+            <a:endParaRPr kumimoji="1" lang="en-US" altLang="ja-JP" sz="2400" dirty="0"/>
+          </a:p>
+          <a:p>
+            <a:r>
+              <a:rPr lang="ja-JP" altLang="en-US" sz="2400" dirty="0"/>
+              <a:t>サーバー側に絶対的に正しいデータがあり、</a:t>
+            </a:r>
+            <a:endParaRPr lang="en-US" altLang="ja-JP" sz="2400" dirty="0"/>
+          </a:p>
+          <a:p>
             <a:r>
               <a:rPr kumimoji="1" lang="ja-JP" altLang="en-US" sz="2400" dirty="0"/>
-              <a:t>種類あります。</a:t>
-            </a:r>
-            <a:endParaRPr kumimoji="1" lang="en-US" altLang="ja-JP" sz="2400" dirty="0"/>
-          </a:p>
-          <a:p>
-            <a:endParaRPr lang="en-US" altLang="ja-JP" sz="2400" dirty="0"/>
-          </a:p>
-          <a:p>
-            <a:r>
-              <a:rPr lang="ja-JP" altLang="en-US" sz="2400" b="1" dirty="0">
-                <a:solidFill>
-                  <a:srgbClr val="FF0000"/>
-                </a:solidFill>
-              </a:rPr>
-              <a:t>・ピアツーピア方式（</a:t>
-            </a:r>
-            <a:r>
-              <a:rPr lang="en-US" altLang="ja-JP" sz="2400" b="1" dirty="0">
-                <a:solidFill>
-                  <a:srgbClr val="FF0000"/>
-                </a:solidFill>
-              </a:rPr>
-              <a:t>P2P</a:t>
-            </a:r>
-            <a:r>
-              <a:rPr lang="ja-JP" altLang="en-US" sz="2400" b="1" dirty="0">
-                <a:solidFill>
-                  <a:srgbClr val="FF0000"/>
-                </a:solidFill>
-              </a:rPr>
-              <a:t>）</a:t>
-            </a:r>
-            <a:endParaRPr lang="en-US" altLang="ja-JP" sz="2400" b="1" dirty="0">
-              <a:solidFill>
-                <a:srgbClr val="FF0000"/>
-              </a:solidFill>
-            </a:endParaRPr>
-          </a:p>
-          <a:p>
-            <a:r>
-              <a:rPr kumimoji="1" lang="ja-JP" altLang="en-US" sz="2400" b="1" dirty="0">
-                <a:solidFill>
-                  <a:srgbClr val="FF0000"/>
-                </a:solidFill>
-              </a:rPr>
-              <a:t>・クライアントサーバー方式</a:t>
-            </a:r>
-            <a:endParaRPr kumimoji="1" lang="en-US" altLang="ja-JP" sz="2400" b="1" dirty="0">
-              <a:solidFill>
-                <a:srgbClr val="FF0000"/>
-              </a:solidFill>
-            </a:endParaRPr>
-          </a:p>
-          <a:p>
-            <a:endParaRPr lang="en-US" altLang="ja-JP" sz="2400" dirty="0"/>
-          </a:p>
-          <a:p>
-            <a:r>
-              <a:rPr kumimoji="1" lang="ja-JP" altLang="en-US" sz="2400" dirty="0"/>
-              <a:t>実際のゲームではこれらの方式を軸に</a:t>
-            </a:r>
-            <a:r>
-              <a:rPr kumimoji="1" lang="ja-JP" altLang="en-US" sz="2400" b="1" dirty="0">
-                <a:solidFill>
-                  <a:srgbClr val="FF0000"/>
-                </a:solidFill>
-              </a:rPr>
-              <a:t>様々な手法に派生</a:t>
-            </a:r>
-            <a:r>
-              <a:rPr kumimoji="1" lang="ja-JP" altLang="en-US" sz="2400" dirty="0"/>
-              <a:t>しています。</a:t>
-            </a:r>
-            <a:endParaRPr kumimoji="1" lang="en-US" altLang="ja-JP" sz="2400" dirty="0"/>
-          </a:p>
-          <a:p>
-            <a:r>
-              <a:rPr lang="ja-JP" altLang="en-US" sz="2400" dirty="0"/>
-              <a:t>まずは軸となる方式を学びましょう。</a:t>
-            </a:r>
-            <a:endParaRPr kumimoji="1" lang="en-US" altLang="ja-JP" sz="2400" dirty="0"/>
-          </a:p>
-        </p:txBody>
-      </p:sp>
-    </p:spTree>
-    <p:extLst>
-      <p:ext uri="{BB962C8B-B14F-4D97-AF65-F5344CB8AC3E}">
-        <p14:creationId xmlns:p14="http://schemas.microsoft.com/office/powerpoint/2010/main" val="3529048355"/>
-      </p:ext>
-    </p:extLst>
-  </p:cSld>
-  <p:clrMapOvr>
-    <a:masterClrMapping/>
-  </p:clrMapOvr>
-</p:sld>
-</file>
-
-<file path=ppt/slides/slide3.xml><?xml version="1.0" encoding="utf-8"?>
-<p:sld xmlns:a="http://schemas.openxmlformats.org/drawingml/2006/main" xmlns:r="http://schemas.openxmlformats.org/officeDocument/2006/relationships" xmlns:p="http://schemas.openxmlformats.org/presentationml/2006/main">
-  <p:cSld>
-    <p:spTree>
-      <p:nvGrpSpPr>
-        <p:cNvPr id="1" name=""/>
-        <p:cNvGrpSpPr/>
-        <p:nvPr/>
-      </p:nvGrpSpPr>
-      <p:grpSpPr>
-        <a:xfrm>
-          <a:off x="0" y="0"/>
-          <a:ext cx="0" cy="0"/>
-          <a:chOff x="0" y="0"/>
-          <a:chExt cx="0" cy="0"/>
-        </a:xfrm>
-      </p:grpSpPr>
-      <p:sp>
-        <p:nvSpPr>
-          <p:cNvPr id="4" name="テキスト ボックス 3">
-            <a:extLst>
-              <a:ext uri="{FF2B5EF4-FFF2-40B4-BE49-F238E27FC236}">
-                <a16:creationId xmlns:a16="http://schemas.microsoft.com/office/drawing/2014/main" id="{5A13BF46-B8C5-48AA-8308-C9ECFF431A18}"/>
-              </a:ext>
-            </a:extLst>
-          </p:cNvPr>
-          <p:cNvSpPr txBox="1"/>
-          <p:nvPr/>
-        </p:nvSpPr>
-        <p:spPr>
-          <a:xfrm>
-            <a:off x="567542" y="491954"/>
-            <a:ext cx="2746265" cy="584775"/>
-          </a:xfrm>
-          <a:prstGeom prst="rect">
-            <a:avLst/>
-          </a:prstGeom>
-          <a:noFill/>
-        </p:spPr>
-        <p:txBody>
-          <a:bodyPr wrap="none" rtlCol="0">
-            <a:spAutoFit/>
-          </a:bodyPr>
-          <a:lstStyle/>
-          <a:p>
-            <a:r>
-              <a:rPr kumimoji="1" lang="ja-JP" altLang="en-US" sz="3200" b="1" u="sng" dirty="0"/>
-              <a:t>通信方式 </a:t>
-            </a:r>
-            <a:r>
-              <a:rPr kumimoji="1" lang="en-US" altLang="ja-JP" sz="3200" b="1" u="sng" dirty="0"/>
-              <a:t>P2P</a:t>
-            </a:r>
-            <a:endParaRPr kumimoji="1" lang="ja-JP" altLang="en-US" sz="3200" b="1" u="sng" dirty="0"/>
-          </a:p>
-        </p:txBody>
-      </p:sp>
-      <p:sp>
-        <p:nvSpPr>
-          <p:cNvPr id="6" name="テキスト ボックス 5">
-            <a:extLst>
-              <a:ext uri="{FF2B5EF4-FFF2-40B4-BE49-F238E27FC236}">
-                <a16:creationId xmlns:a16="http://schemas.microsoft.com/office/drawing/2014/main" id="{55830AD6-028B-4C4E-80BF-B70DFC1C3A46}"/>
-              </a:ext>
-            </a:extLst>
-          </p:cNvPr>
-          <p:cNvSpPr txBox="1"/>
-          <p:nvPr/>
-        </p:nvSpPr>
-        <p:spPr>
-          <a:xfrm>
-            <a:off x="567542" y="1216429"/>
-            <a:ext cx="10756471" cy="1200329"/>
-          </a:xfrm>
-          <a:prstGeom prst="rect">
-            <a:avLst/>
-          </a:prstGeom>
-          <a:noFill/>
-        </p:spPr>
-        <p:txBody>
-          <a:bodyPr wrap="none" rtlCol="0">
-            <a:spAutoFit/>
-          </a:bodyPr>
-          <a:lstStyle/>
-          <a:p>
-            <a:r>
-              <a:rPr kumimoji="1" lang="en-US" altLang="ja-JP" sz="2400" b="1" dirty="0">
-                <a:solidFill>
-                  <a:srgbClr val="FF0000"/>
-                </a:solidFill>
-              </a:rPr>
-              <a:t>P2P</a:t>
-            </a:r>
-            <a:r>
-              <a:rPr kumimoji="1" lang="ja-JP" altLang="en-US" sz="2400" b="1" dirty="0">
-                <a:solidFill>
-                  <a:srgbClr val="FF0000"/>
-                </a:solidFill>
-              </a:rPr>
-              <a:t>方式</a:t>
-            </a:r>
-            <a:r>
-              <a:rPr kumimoji="1" lang="ja-JP" altLang="en-US" sz="2400" dirty="0"/>
-              <a:t>は単純に</a:t>
-            </a:r>
-            <a:r>
-              <a:rPr kumimoji="1" lang="ja-JP" altLang="en-US" sz="2400" b="1" dirty="0">
-                <a:solidFill>
-                  <a:srgbClr val="FF0000"/>
-                </a:solidFill>
-              </a:rPr>
-              <a:t>お互いでデータを送りあう方式</a:t>
-            </a:r>
-            <a:r>
-              <a:rPr kumimoji="1" lang="ja-JP" altLang="en-US" sz="2400" dirty="0"/>
-              <a:t>です。</a:t>
-            </a:r>
-            <a:endParaRPr kumimoji="1" lang="en-US" altLang="ja-JP" sz="2400" dirty="0"/>
-          </a:p>
-          <a:p>
-            <a:r>
-              <a:rPr kumimoji="1" lang="ja-JP" altLang="en-US" sz="2400" dirty="0"/>
-              <a:t>サーバーという概念は無く、</a:t>
-            </a:r>
-            <a:r>
-              <a:rPr lang="ja-JP" altLang="en-US" sz="2400" dirty="0"/>
-              <a:t>お互いがデータを送信、受信します。</a:t>
-            </a:r>
-            <a:endParaRPr lang="en-US" altLang="ja-JP" sz="2400" dirty="0"/>
-          </a:p>
-          <a:p>
-            <a:r>
-              <a:rPr lang="ja-JP" altLang="en-US" sz="2400" b="1" dirty="0">
-                <a:solidFill>
-                  <a:srgbClr val="FF0000"/>
-                </a:solidFill>
-              </a:rPr>
-              <a:t>ローカル通信対戦や小規模な１</a:t>
-            </a:r>
-            <a:r>
-              <a:rPr lang="en-US" altLang="ja-JP" sz="2400" b="1" dirty="0">
-                <a:solidFill>
-                  <a:srgbClr val="FF0000"/>
-                </a:solidFill>
-              </a:rPr>
-              <a:t>VS</a:t>
-            </a:r>
-            <a:r>
-              <a:rPr lang="ja-JP" altLang="en-US" sz="2400" b="1" dirty="0">
-                <a:solidFill>
-                  <a:srgbClr val="FF0000"/>
-                </a:solidFill>
-              </a:rPr>
-              <a:t>１オンライン対戦ゲーム</a:t>
-            </a:r>
-            <a:r>
-              <a:rPr lang="ja-JP" altLang="en-US" sz="2400" dirty="0"/>
-              <a:t>で採用されます。</a:t>
-            </a:r>
-            <a:endParaRPr lang="en-US" altLang="ja-JP" sz="2400" dirty="0"/>
-          </a:p>
-        </p:txBody>
-      </p:sp>
-      <p:sp>
-        <p:nvSpPr>
-          <p:cNvPr id="5" name="二等辺三角形 4">
-            <a:extLst>
-              <a:ext uri="{FF2B5EF4-FFF2-40B4-BE49-F238E27FC236}">
-                <a16:creationId xmlns:a16="http://schemas.microsoft.com/office/drawing/2014/main" id="{F8AE2564-9C06-4CC7-BBA5-01BEBFA50536}"/>
-              </a:ext>
-            </a:extLst>
-          </p:cNvPr>
-          <p:cNvSpPr/>
-          <p:nvPr/>
-        </p:nvSpPr>
-        <p:spPr>
-          <a:xfrm>
-            <a:off x="2351518" y="4610951"/>
-            <a:ext cx="699247" cy="555812"/>
-          </a:xfrm>
-          <a:prstGeom prst="triangle">
-            <a:avLst/>
-          </a:prstGeom>
-        </p:spPr>
-        <p:style>
-          <a:lnRef idx="2">
-            <a:schemeClr val="accent1">
-              <a:shade val="50000"/>
-            </a:schemeClr>
-          </a:lnRef>
-          <a:fillRef idx="1">
-            <a:schemeClr val="accent1"/>
-          </a:fillRef>
-          <a:effectRef idx="0">
-            <a:schemeClr val="accent1"/>
-          </a:effectRef>
-          <a:fontRef idx="minor">
-            <a:schemeClr val="lt1"/>
-          </a:fontRef>
-        </p:style>
-        <p:txBody>
-          <a:bodyPr rtlCol="0" anchor="ctr"/>
-          <a:lstStyle/>
-          <a:p>
-            <a:pPr algn="ctr"/>
-            <a:endParaRPr kumimoji="1" lang="ja-JP" altLang="en-US"/>
-          </a:p>
-        </p:txBody>
-      </p:sp>
-      <p:sp>
-        <p:nvSpPr>
-          <p:cNvPr id="7" name="正方形/長方形 6">
-            <a:extLst>
-              <a:ext uri="{FF2B5EF4-FFF2-40B4-BE49-F238E27FC236}">
-                <a16:creationId xmlns:a16="http://schemas.microsoft.com/office/drawing/2014/main" id="{DA6568F9-232A-4A7E-83DB-3FD8852BF368}"/>
-              </a:ext>
-            </a:extLst>
-          </p:cNvPr>
-          <p:cNvSpPr/>
-          <p:nvPr/>
-        </p:nvSpPr>
-        <p:spPr>
-          <a:xfrm>
-            <a:off x="1831564" y="3517257"/>
-            <a:ext cx="1748118" cy="1093694"/>
-          </a:xfrm>
-          <a:prstGeom prst="rect">
-            <a:avLst/>
-          </a:prstGeom>
-          <a:noFill/>
-        </p:spPr>
-        <p:style>
-          <a:lnRef idx="2">
-            <a:schemeClr val="accent1">
-              <a:shade val="50000"/>
-            </a:schemeClr>
-          </a:lnRef>
-          <a:fillRef idx="1">
-            <a:schemeClr val="accent1"/>
-          </a:fillRef>
-          <a:effectRef idx="0">
-            <a:schemeClr val="accent1"/>
-          </a:effectRef>
-          <a:fontRef idx="minor">
-            <a:schemeClr val="lt1"/>
-          </a:fontRef>
-        </p:style>
-        <p:txBody>
-          <a:bodyPr rtlCol="0" anchor="ctr"/>
-          <a:lstStyle/>
-          <a:p>
-            <a:pPr algn="ctr"/>
-            <a:endParaRPr kumimoji="1" lang="ja-JP" altLang="en-US"/>
-          </a:p>
-        </p:txBody>
-      </p:sp>
-      <p:sp>
-        <p:nvSpPr>
-          <p:cNvPr id="8" name="スマイル 7">
-            <a:extLst>
-              <a:ext uri="{FF2B5EF4-FFF2-40B4-BE49-F238E27FC236}">
-                <a16:creationId xmlns:a16="http://schemas.microsoft.com/office/drawing/2014/main" id="{B19C6A8D-2B38-4F13-B3C4-30CF59E67DB2}"/>
-              </a:ext>
-            </a:extLst>
-          </p:cNvPr>
-          <p:cNvSpPr/>
-          <p:nvPr/>
-        </p:nvSpPr>
-        <p:spPr>
-          <a:xfrm>
-            <a:off x="2208082" y="3708910"/>
-            <a:ext cx="251011" cy="236796"/>
-          </a:xfrm>
-          <a:prstGeom prst="smileyFace">
-            <a:avLst/>
-          </a:prstGeom>
-        </p:spPr>
-        <p:style>
-          <a:lnRef idx="2">
-            <a:schemeClr val="accent1">
-              <a:shade val="50000"/>
-            </a:schemeClr>
-          </a:lnRef>
-          <a:fillRef idx="1">
-            <a:schemeClr val="accent1"/>
-          </a:fillRef>
-          <a:effectRef idx="0">
-            <a:schemeClr val="accent1"/>
-          </a:effectRef>
-          <a:fontRef idx="minor">
-            <a:schemeClr val="lt1"/>
-          </a:fontRef>
-        </p:style>
-        <p:txBody>
-          <a:bodyPr rtlCol="0" anchor="ctr"/>
-          <a:lstStyle/>
-          <a:p>
-            <a:pPr algn="ctr"/>
-            <a:endParaRPr kumimoji="1" lang="ja-JP" altLang="en-US"/>
-          </a:p>
-        </p:txBody>
-      </p:sp>
-      <p:sp>
-        <p:nvSpPr>
-          <p:cNvPr id="9" name="スマイル 8">
-            <a:extLst>
-              <a:ext uri="{FF2B5EF4-FFF2-40B4-BE49-F238E27FC236}">
-                <a16:creationId xmlns:a16="http://schemas.microsoft.com/office/drawing/2014/main" id="{D4382F14-BE54-462F-BACF-8F1B52492FE6}"/>
-              </a:ext>
-            </a:extLst>
-          </p:cNvPr>
-          <p:cNvSpPr/>
-          <p:nvPr/>
-        </p:nvSpPr>
-        <p:spPr>
-          <a:xfrm>
-            <a:off x="2938706" y="3921278"/>
-            <a:ext cx="251011" cy="236796"/>
-          </a:xfrm>
-          <a:prstGeom prst="smileyFace">
-            <a:avLst/>
-          </a:prstGeom>
-          <a:solidFill>
-            <a:srgbClr val="FFFF00"/>
-          </a:solidFill>
-          <a:ln>
-            <a:solidFill>
-              <a:schemeClr val="tx1"/>
-            </a:solidFill>
-          </a:ln>
-        </p:spPr>
-        <p:style>
-          <a:lnRef idx="2">
-            <a:schemeClr val="accent1">
-              <a:shade val="50000"/>
-            </a:schemeClr>
-          </a:lnRef>
-          <a:fillRef idx="1">
-            <a:schemeClr val="accent1"/>
-          </a:fillRef>
-          <a:effectRef idx="0">
-            <a:schemeClr val="accent1"/>
-          </a:effectRef>
-          <a:fontRef idx="minor">
-            <a:schemeClr val="lt1"/>
-          </a:fontRef>
-        </p:style>
-        <p:txBody>
-          <a:bodyPr rtlCol="0" anchor="ctr"/>
-          <a:lstStyle/>
-          <a:p>
-            <a:pPr algn="ctr"/>
-            <a:endParaRPr kumimoji="1" lang="ja-JP" altLang="en-US"/>
-          </a:p>
-        </p:txBody>
-      </p:sp>
-      <p:sp>
-        <p:nvSpPr>
-          <p:cNvPr id="10" name="二等辺三角形 9">
-            <a:extLst>
-              <a:ext uri="{FF2B5EF4-FFF2-40B4-BE49-F238E27FC236}">
-                <a16:creationId xmlns:a16="http://schemas.microsoft.com/office/drawing/2014/main" id="{D082CFF6-6A9A-43C3-A36D-897424BB5E8F}"/>
-              </a:ext>
-            </a:extLst>
-          </p:cNvPr>
-          <p:cNvSpPr/>
-          <p:nvPr/>
-        </p:nvSpPr>
-        <p:spPr>
-          <a:xfrm>
-            <a:off x="6764919" y="4547826"/>
-            <a:ext cx="699247" cy="555812"/>
-          </a:xfrm>
-          <a:prstGeom prst="triangle">
-            <a:avLst/>
-          </a:prstGeom>
-        </p:spPr>
-        <p:style>
-          <a:lnRef idx="2">
-            <a:schemeClr val="accent1">
-              <a:shade val="50000"/>
-            </a:schemeClr>
-          </a:lnRef>
-          <a:fillRef idx="1">
-            <a:schemeClr val="accent1"/>
-          </a:fillRef>
-          <a:effectRef idx="0">
-            <a:schemeClr val="accent1"/>
-          </a:effectRef>
-          <a:fontRef idx="minor">
-            <a:schemeClr val="lt1"/>
-          </a:fontRef>
-        </p:style>
-        <p:txBody>
-          <a:bodyPr rtlCol="0" anchor="ctr"/>
-          <a:lstStyle/>
-          <a:p>
-            <a:pPr algn="ctr"/>
-            <a:endParaRPr kumimoji="1" lang="ja-JP" altLang="en-US"/>
-          </a:p>
-        </p:txBody>
-      </p:sp>
-      <p:sp>
-        <p:nvSpPr>
-          <p:cNvPr id="11" name="正方形/長方形 10">
-            <a:extLst>
-              <a:ext uri="{FF2B5EF4-FFF2-40B4-BE49-F238E27FC236}">
-                <a16:creationId xmlns:a16="http://schemas.microsoft.com/office/drawing/2014/main" id="{BAC039B1-C514-4297-AD9D-0BFD75C854C8}"/>
-              </a:ext>
-            </a:extLst>
-          </p:cNvPr>
-          <p:cNvSpPr/>
-          <p:nvPr/>
-        </p:nvSpPr>
-        <p:spPr>
-          <a:xfrm>
-            <a:off x="6244965" y="3454132"/>
-            <a:ext cx="1748118" cy="1093694"/>
-          </a:xfrm>
-          <a:prstGeom prst="rect">
-            <a:avLst/>
-          </a:prstGeom>
-          <a:noFill/>
-        </p:spPr>
-        <p:style>
-          <a:lnRef idx="2">
-            <a:schemeClr val="accent1">
-              <a:shade val="50000"/>
-            </a:schemeClr>
-          </a:lnRef>
-          <a:fillRef idx="1">
-            <a:schemeClr val="accent1"/>
-          </a:fillRef>
-          <a:effectRef idx="0">
-            <a:schemeClr val="accent1"/>
-          </a:effectRef>
-          <a:fontRef idx="minor">
-            <a:schemeClr val="lt1"/>
-          </a:fontRef>
-        </p:style>
-        <p:txBody>
-          <a:bodyPr rtlCol="0" anchor="ctr"/>
-          <a:lstStyle/>
-          <a:p>
-            <a:pPr algn="ctr"/>
-            <a:endParaRPr kumimoji="1" lang="ja-JP" altLang="en-US"/>
-          </a:p>
-        </p:txBody>
-      </p:sp>
-      <p:sp>
-        <p:nvSpPr>
-          <p:cNvPr id="12" name="スマイル 11">
-            <a:extLst>
-              <a:ext uri="{FF2B5EF4-FFF2-40B4-BE49-F238E27FC236}">
-                <a16:creationId xmlns:a16="http://schemas.microsoft.com/office/drawing/2014/main" id="{B95B12D7-F5DD-4BE6-BE77-23016009DAD9}"/>
-              </a:ext>
-            </a:extLst>
-          </p:cNvPr>
-          <p:cNvSpPr/>
-          <p:nvPr/>
-        </p:nvSpPr>
-        <p:spPr>
-          <a:xfrm>
-            <a:off x="6621483" y="3645785"/>
-            <a:ext cx="251011" cy="236796"/>
-          </a:xfrm>
-          <a:prstGeom prst="smileyFace">
-            <a:avLst/>
-          </a:prstGeom>
-        </p:spPr>
-        <p:style>
-          <a:lnRef idx="2">
-            <a:schemeClr val="accent1">
-              <a:shade val="50000"/>
-            </a:schemeClr>
-          </a:lnRef>
-          <a:fillRef idx="1">
-            <a:schemeClr val="accent1"/>
-          </a:fillRef>
-          <a:effectRef idx="0">
-            <a:schemeClr val="accent1"/>
-          </a:effectRef>
-          <a:fontRef idx="minor">
-            <a:schemeClr val="lt1"/>
-          </a:fontRef>
-        </p:style>
-        <p:txBody>
-          <a:bodyPr rtlCol="0" anchor="ctr"/>
-          <a:lstStyle/>
-          <a:p>
-            <a:pPr algn="ctr"/>
-            <a:endParaRPr kumimoji="1" lang="ja-JP" altLang="en-US"/>
-          </a:p>
-        </p:txBody>
-      </p:sp>
-      <p:sp>
-        <p:nvSpPr>
-          <p:cNvPr id="13" name="スマイル 12">
-            <a:extLst>
-              <a:ext uri="{FF2B5EF4-FFF2-40B4-BE49-F238E27FC236}">
-                <a16:creationId xmlns:a16="http://schemas.microsoft.com/office/drawing/2014/main" id="{4714BF1B-58C7-4310-B86E-9D6B680101FC}"/>
-              </a:ext>
-            </a:extLst>
-          </p:cNvPr>
-          <p:cNvSpPr/>
-          <p:nvPr/>
-        </p:nvSpPr>
-        <p:spPr>
-          <a:xfrm>
-            <a:off x="7352107" y="3858153"/>
-            <a:ext cx="251011" cy="236796"/>
-          </a:xfrm>
-          <a:prstGeom prst="smileyFace">
-            <a:avLst/>
-          </a:prstGeom>
-          <a:solidFill>
-            <a:srgbClr val="FFFF00"/>
-          </a:solidFill>
-          <a:ln>
-            <a:solidFill>
-              <a:schemeClr val="tx1"/>
-            </a:solidFill>
-          </a:ln>
-        </p:spPr>
-        <p:style>
-          <a:lnRef idx="2">
-            <a:schemeClr val="accent1">
-              <a:shade val="50000"/>
-            </a:schemeClr>
-          </a:lnRef>
-          <a:fillRef idx="1">
-            <a:schemeClr val="accent1"/>
-          </a:fillRef>
-          <a:effectRef idx="0">
-            <a:schemeClr val="accent1"/>
-          </a:effectRef>
-          <a:fontRef idx="minor">
-            <a:schemeClr val="lt1"/>
-          </a:fontRef>
-        </p:style>
-        <p:txBody>
-          <a:bodyPr rtlCol="0" anchor="ctr"/>
-          <a:lstStyle/>
-          <a:p>
-            <a:pPr algn="ctr"/>
-            <a:endParaRPr kumimoji="1" lang="ja-JP" altLang="en-US"/>
-          </a:p>
-        </p:txBody>
-      </p:sp>
-      <p:sp>
-        <p:nvSpPr>
-          <p:cNvPr id="14" name="テキスト ボックス 13">
-            <a:extLst>
-              <a:ext uri="{FF2B5EF4-FFF2-40B4-BE49-F238E27FC236}">
-                <a16:creationId xmlns:a16="http://schemas.microsoft.com/office/drawing/2014/main" id="{EB72EFE6-D599-4453-8F92-5D71A56F3F8A}"/>
-              </a:ext>
-            </a:extLst>
-          </p:cNvPr>
-          <p:cNvSpPr txBox="1"/>
-          <p:nvPr/>
-        </p:nvSpPr>
-        <p:spPr>
-          <a:xfrm>
-            <a:off x="1993255" y="3145970"/>
-            <a:ext cx="1415772" cy="338554"/>
-          </a:xfrm>
-          <a:prstGeom prst="rect">
-            <a:avLst/>
-          </a:prstGeom>
-          <a:noFill/>
-        </p:spPr>
-        <p:txBody>
-          <a:bodyPr wrap="none" rtlCol="0">
-            <a:spAutoFit/>
-          </a:bodyPr>
-          <a:lstStyle/>
-          <a:p>
-            <a:r>
-              <a:rPr kumimoji="1" lang="ja-JP" altLang="en-US" sz="1600" b="1" dirty="0"/>
-              <a:t>クライアント</a:t>
-            </a:r>
-            <a:endParaRPr lang="en-US" altLang="ja-JP" sz="1600" b="1" dirty="0"/>
-          </a:p>
-        </p:txBody>
-      </p:sp>
-      <p:sp>
-        <p:nvSpPr>
-          <p:cNvPr id="15" name="テキスト ボックス 14">
-            <a:extLst>
-              <a:ext uri="{FF2B5EF4-FFF2-40B4-BE49-F238E27FC236}">
-                <a16:creationId xmlns:a16="http://schemas.microsoft.com/office/drawing/2014/main" id="{04359DE7-3DE6-4779-9938-7BAB5AF4A392}"/>
-              </a:ext>
-            </a:extLst>
-          </p:cNvPr>
-          <p:cNvSpPr txBox="1"/>
-          <p:nvPr/>
-        </p:nvSpPr>
-        <p:spPr>
-          <a:xfrm>
-            <a:off x="6406656" y="3145970"/>
-            <a:ext cx="1415772" cy="338554"/>
-          </a:xfrm>
-          <a:prstGeom prst="rect">
-            <a:avLst/>
-          </a:prstGeom>
-          <a:noFill/>
-        </p:spPr>
-        <p:txBody>
-          <a:bodyPr wrap="none" rtlCol="0">
-            <a:spAutoFit/>
-          </a:bodyPr>
-          <a:lstStyle/>
-          <a:p>
-            <a:r>
-              <a:rPr kumimoji="1" lang="ja-JP" altLang="en-US" sz="1600" b="1" dirty="0"/>
-              <a:t>クライアント</a:t>
-            </a:r>
-            <a:endParaRPr lang="en-US" altLang="ja-JP" sz="1600" b="1" dirty="0"/>
-          </a:p>
-        </p:txBody>
-      </p:sp>
-      <p:sp>
-        <p:nvSpPr>
-          <p:cNvPr id="2" name="矢印: 左右 1">
-            <a:extLst>
-              <a:ext uri="{FF2B5EF4-FFF2-40B4-BE49-F238E27FC236}">
-                <a16:creationId xmlns:a16="http://schemas.microsoft.com/office/drawing/2014/main" id="{F641EFCF-EF63-4B67-990C-78C3A95D0D12}"/>
-              </a:ext>
-            </a:extLst>
-          </p:cNvPr>
-          <p:cNvSpPr/>
-          <p:nvPr/>
-        </p:nvSpPr>
-        <p:spPr>
-          <a:xfrm>
-            <a:off x="3765177" y="3748131"/>
-            <a:ext cx="2260478" cy="583090"/>
-          </a:xfrm>
-          <a:prstGeom prst="leftRightArrow">
-            <a:avLst/>
-          </a:prstGeom>
-        </p:spPr>
-        <p:style>
-          <a:lnRef idx="2">
-            <a:schemeClr val="accent1">
-              <a:shade val="50000"/>
-            </a:schemeClr>
-          </a:lnRef>
-          <a:fillRef idx="1">
-            <a:schemeClr val="accent1"/>
-          </a:fillRef>
-          <a:effectRef idx="0">
-            <a:schemeClr val="accent1"/>
-          </a:effectRef>
-          <a:fontRef idx="minor">
-            <a:schemeClr val="lt1"/>
-          </a:fontRef>
-        </p:style>
-        <p:txBody>
-          <a:bodyPr rtlCol="0" anchor="ctr"/>
-          <a:lstStyle/>
-          <a:p>
-            <a:pPr algn="ctr"/>
-            <a:r>
-              <a:rPr kumimoji="1" lang="ja-JP" altLang="en-US" b="1" dirty="0"/>
-              <a:t>データ</a:t>
-            </a:r>
-          </a:p>
-        </p:txBody>
-      </p:sp>
-    </p:spTree>
-    <p:extLst>
-      <p:ext uri="{BB962C8B-B14F-4D97-AF65-F5344CB8AC3E}">
-        <p14:creationId xmlns:p14="http://schemas.microsoft.com/office/powerpoint/2010/main" val="1722213165"/>
-      </p:ext>
-    </p:extLst>
-  </p:cSld>
-  <p:clrMapOvr>
-    <a:masterClrMapping/>
-  </p:clrMapOvr>
-</p:sld>
-</file>
-
-<file path=ppt/slides/slide4.xml><?xml version="1.0" encoding="utf-8"?>
-<p:sld xmlns:a="http://schemas.openxmlformats.org/drawingml/2006/main" xmlns:r="http://schemas.openxmlformats.org/officeDocument/2006/relationships" xmlns:p="http://schemas.openxmlformats.org/presentationml/2006/main">
-  <p:cSld>
-    <p:spTree>
-      <p:nvGrpSpPr>
-        <p:cNvPr id="1" name=""/>
-        <p:cNvGrpSpPr/>
-        <p:nvPr/>
-      </p:nvGrpSpPr>
-      <p:grpSpPr>
-        <a:xfrm>
-          <a:off x="0" y="0"/>
-          <a:ext cx="0" cy="0"/>
-          <a:chOff x="0" y="0"/>
-          <a:chExt cx="0" cy="0"/>
-        </a:xfrm>
-      </p:grpSpPr>
-      <p:sp>
-        <p:nvSpPr>
-          <p:cNvPr id="4" name="テキスト ボックス 3">
-            <a:extLst>
-              <a:ext uri="{FF2B5EF4-FFF2-40B4-BE49-F238E27FC236}">
-                <a16:creationId xmlns:a16="http://schemas.microsoft.com/office/drawing/2014/main" id="{5A13BF46-B8C5-48AA-8308-C9ECFF431A18}"/>
-              </a:ext>
-            </a:extLst>
-          </p:cNvPr>
-          <p:cNvSpPr txBox="1"/>
-          <p:nvPr/>
-        </p:nvSpPr>
-        <p:spPr>
-          <a:xfrm>
-            <a:off x="567542" y="491954"/>
-            <a:ext cx="2746265" cy="584775"/>
-          </a:xfrm>
-          <a:prstGeom prst="rect">
-            <a:avLst/>
-          </a:prstGeom>
-          <a:noFill/>
-        </p:spPr>
-        <p:txBody>
-          <a:bodyPr wrap="none" rtlCol="0">
-            <a:spAutoFit/>
-          </a:bodyPr>
-          <a:lstStyle/>
-          <a:p>
-            <a:r>
-              <a:rPr kumimoji="1" lang="ja-JP" altLang="en-US" sz="3200" b="1" u="sng" dirty="0"/>
-              <a:t>通信方式 </a:t>
-            </a:r>
-            <a:r>
-              <a:rPr kumimoji="1" lang="en-US" altLang="ja-JP" sz="3200" b="1" u="sng" dirty="0"/>
-              <a:t>P2P</a:t>
-            </a:r>
-            <a:endParaRPr kumimoji="1" lang="ja-JP" altLang="en-US" sz="3200" b="1" u="sng" dirty="0"/>
-          </a:p>
-        </p:txBody>
-      </p:sp>
-      <p:sp>
-        <p:nvSpPr>
-          <p:cNvPr id="6" name="テキスト ボックス 5">
-            <a:extLst>
-              <a:ext uri="{FF2B5EF4-FFF2-40B4-BE49-F238E27FC236}">
-                <a16:creationId xmlns:a16="http://schemas.microsoft.com/office/drawing/2014/main" id="{55830AD6-028B-4C4E-80BF-B70DFC1C3A46}"/>
-              </a:ext>
-            </a:extLst>
-          </p:cNvPr>
-          <p:cNvSpPr txBox="1"/>
-          <p:nvPr/>
-        </p:nvSpPr>
-        <p:spPr>
-          <a:xfrm>
-            <a:off x="567542" y="1216429"/>
-            <a:ext cx="7879080" cy="5262979"/>
-          </a:xfrm>
-          <a:prstGeom prst="rect">
-            <a:avLst/>
-          </a:prstGeom>
-          <a:noFill/>
-        </p:spPr>
-        <p:txBody>
-          <a:bodyPr wrap="none" rtlCol="0">
-            <a:spAutoFit/>
-          </a:bodyPr>
-          <a:lstStyle/>
-          <a:p>
-            <a:r>
-              <a:rPr kumimoji="1" lang="en-US" altLang="ja-JP" sz="2400" dirty="0"/>
-              <a:t>P2P</a:t>
-            </a:r>
-            <a:r>
-              <a:rPr kumimoji="1" lang="ja-JP" altLang="en-US" sz="2400" dirty="0"/>
-              <a:t>のメリットとデメリットです</a:t>
-            </a:r>
-            <a:endParaRPr kumimoji="1" lang="en-US" altLang="ja-JP" sz="2400" dirty="0"/>
-          </a:p>
-          <a:p>
-            <a:endParaRPr kumimoji="1" lang="en-US" altLang="ja-JP" sz="2400" dirty="0"/>
-          </a:p>
-          <a:p>
-            <a:r>
-              <a:rPr lang="ja-JP" altLang="en-US" sz="2400" b="1" dirty="0">
-                <a:solidFill>
-                  <a:srgbClr val="FF0000"/>
-                </a:solidFill>
-              </a:rPr>
-              <a:t>■</a:t>
-            </a:r>
-            <a:r>
-              <a:rPr lang="en-US" altLang="ja-JP" sz="2400" b="1" dirty="0">
-                <a:solidFill>
-                  <a:srgbClr val="FF0000"/>
-                </a:solidFill>
-              </a:rPr>
-              <a:t>P2P</a:t>
-            </a:r>
-            <a:r>
-              <a:rPr lang="ja-JP" altLang="en-US" sz="2400" b="1" dirty="0">
-                <a:solidFill>
-                  <a:srgbClr val="FF0000"/>
-                </a:solidFill>
-              </a:rPr>
-              <a:t>のメリット</a:t>
-            </a:r>
-            <a:endParaRPr lang="en-US" altLang="ja-JP" sz="2400" b="1" dirty="0">
-              <a:solidFill>
-                <a:srgbClr val="FF0000"/>
-              </a:solidFill>
-            </a:endParaRPr>
-          </a:p>
-          <a:p>
-            <a:r>
-              <a:rPr lang="ja-JP" altLang="en-US" sz="2400" dirty="0"/>
-              <a:t>・サーバーがいらない</a:t>
-            </a:r>
-            <a:endParaRPr lang="en-US" altLang="ja-JP" sz="2400" dirty="0"/>
-          </a:p>
-          <a:p>
-            <a:r>
-              <a:rPr lang="ja-JP" altLang="en-US" sz="2400" dirty="0"/>
-              <a:t>　・制作、運営コスト</a:t>
-            </a:r>
-            <a:r>
-              <a:rPr lang="en-US" altLang="ja-JP" sz="2400" dirty="0"/>
-              <a:t>0</a:t>
-            </a:r>
-          </a:p>
-          <a:p>
-            <a:r>
-              <a:rPr kumimoji="1" lang="ja-JP" altLang="en-US" sz="2400" dirty="0"/>
-              <a:t>・サーバーを仲介しない</a:t>
-            </a:r>
-            <a:endParaRPr kumimoji="1" lang="en-US" altLang="ja-JP" sz="2400" dirty="0"/>
-          </a:p>
-          <a:p>
-            <a:r>
-              <a:rPr lang="ja-JP" altLang="en-US" sz="2400" dirty="0"/>
-              <a:t>　・通信が速い</a:t>
-            </a:r>
-            <a:endParaRPr lang="en-US" altLang="ja-JP" sz="2400" dirty="0"/>
-          </a:p>
-          <a:p>
-            <a:endParaRPr kumimoji="1" lang="en-US" altLang="ja-JP" sz="2400" dirty="0"/>
-          </a:p>
-          <a:p>
-            <a:r>
-              <a:rPr lang="ja-JP" altLang="en-US" sz="2400" b="1" dirty="0">
-                <a:solidFill>
-                  <a:srgbClr val="0070C0"/>
-                </a:solidFill>
-              </a:rPr>
-              <a:t>■</a:t>
-            </a:r>
-            <a:r>
-              <a:rPr lang="en-US" altLang="ja-JP" sz="2400" b="1" dirty="0">
-                <a:solidFill>
-                  <a:srgbClr val="0070C0"/>
-                </a:solidFill>
-              </a:rPr>
-              <a:t>P2P</a:t>
-            </a:r>
-            <a:r>
-              <a:rPr lang="ja-JP" altLang="en-US" sz="2400" b="1" dirty="0">
-                <a:solidFill>
-                  <a:srgbClr val="0070C0"/>
-                </a:solidFill>
-              </a:rPr>
-              <a:t>のデメリット</a:t>
-            </a:r>
-            <a:endParaRPr lang="en-US" altLang="ja-JP" sz="2400" b="1" dirty="0">
-              <a:solidFill>
-                <a:srgbClr val="0070C0"/>
-              </a:solidFill>
-            </a:endParaRPr>
-          </a:p>
-          <a:p>
-            <a:r>
-              <a:rPr lang="ja-JP" altLang="en-US" sz="2400" dirty="0"/>
-              <a:t>・タイミングにラグが発生する</a:t>
-            </a:r>
-            <a:endParaRPr lang="en-US" altLang="ja-JP" sz="2400" dirty="0"/>
-          </a:p>
-          <a:p>
-            <a:r>
-              <a:rPr kumimoji="1" lang="ja-JP" altLang="en-US" sz="2400" dirty="0"/>
-              <a:t>　・１Ｐと２Ｐで見た目が違うときがある（</a:t>
-            </a:r>
-            <a:r>
-              <a:rPr kumimoji="1" lang="ja-JP" altLang="en-US" sz="2400" b="1" dirty="0">
-                <a:solidFill>
-                  <a:srgbClr val="FF0000"/>
-                </a:solidFill>
-              </a:rPr>
-              <a:t>同期ずれ</a:t>
-            </a:r>
-            <a:r>
-              <a:rPr kumimoji="1" lang="ja-JP" altLang="en-US" sz="2400" dirty="0"/>
-              <a:t>）</a:t>
-            </a:r>
-            <a:endParaRPr kumimoji="1" lang="en-US" altLang="ja-JP" sz="2400" dirty="0"/>
-          </a:p>
-          <a:p>
-            <a:r>
-              <a:rPr lang="ja-JP" altLang="en-US" sz="2400" dirty="0"/>
-              <a:t>・チート、改造をリアルタイムで検知できない</a:t>
-            </a:r>
-            <a:endParaRPr lang="en-US" altLang="ja-JP" sz="2400" dirty="0"/>
-          </a:p>
-          <a:p>
-            <a:r>
-              <a:rPr kumimoji="1" lang="ja-JP" altLang="en-US" sz="2400" dirty="0"/>
-              <a:t>・デメリットに対する対策をする必要がある</a:t>
-            </a:r>
-            <a:endParaRPr kumimoji="1" lang="en-US" altLang="ja-JP" sz="2400" dirty="0"/>
-          </a:p>
-          <a:p>
-            <a:r>
-              <a:rPr lang="ja-JP" altLang="en-US" sz="2400" dirty="0"/>
-              <a:t>　・入力同期やロールバック方式など</a:t>
-            </a:r>
-            <a:endParaRPr kumimoji="1" lang="en-US" altLang="ja-JP" sz="2400" dirty="0"/>
-          </a:p>
-        </p:txBody>
-      </p:sp>
-    </p:spTree>
-    <p:extLst>
-      <p:ext uri="{BB962C8B-B14F-4D97-AF65-F5344CB8AC3E}">
-        <p14:creationId xmlns:p14="http://schemas.microsoft.com/office/powerpoint/2010/main" val="3400703879"/>
-      </p:ext>
-    </p:extLst>
-  </p:cSld>
-  <p:clrMapOvr>
-    <a:masterClrMapping/>
-  </p:clrMapOvr>
-</p:sld>
-</file>
-
-<file path=ppt/slides/slide5.xml><?xml version="1.0" encoding="utf-8"?>
-<p:sld xmlns:a="http://schemas.openxmlformats.org/drawingml/2006/main" xmlns:r="http://schemas.openxmlformats.org/officeDocument/2006/relationships" xmlns:p="http://schemas.openxmlformats.org/presentationml/2006/main">
-  <p:cSld>
-    <p:spTree>
-      <p:nvGrpSpPr>
-        <p:cNvPr id="1" name=""/>
-        <p:cNvGrpSpPr/>
-        <p:nvPr/>
-      </p:nvGrpSpPr>
-      <p:grpSpPr>
-        <a:xfrm>
-          <a:off x="0" y="0"/>
-          <a:ext cx="0" cy="0"/>
-          <a:chOff x="0" y="0"/>
-          <a:chExt cx="0" cy="0"/>
-        </a:xfrm>
-      </p:grpSpPr>
-      <p:sp>
-        <p:nvSpPr>
-          <p:cNvPr id="4" name="テキスト ボックス 3">
-            <a:extLst>
-              <a:ext uri="{FF2B5EF4-FFF2-40B4-BE49-F238E27FC236}">
-                <a16:creationId xmlns:a16="http://schemas.microsoft.com/office/drawing/2014/main" id="{5A13BF46-B8C5-48AA-8308-C9ECFF431A18}"/>
-              </a:ext>
-            </a:extLst>
-          </p:cNvPr>
-          <p:cNvSpPr txBox="1"/>
-          <p:nvPr/>
-        </p:nvSpPr>
-        <p:spPr>
-          <a:xfrm>
-            <a:off x="567542" y="491954"/>
-            <a:ext cx="6046848" cy="584775"/>
-          </a:xfrm>
-          <a:prstGeom prst="rect">
-            <a:avLst/>
-          </a:prstGeom>
-          <a:noFill/>
-        </p:spPr>
-        <p:txBody>
-          <a:bodyPr wrap="none" rtlCol="0">
-            <a:spAutoFit/>
-          </a:bodyPr>
-          <a:lstStyle/>
-          <a:p>
-            <a:r>
-              <a:rPr kumimoji="1" lang="ja-JP" altLang="en-US" sz="3200" b="1" u="sng" dirty="0"/>
-              <a:t>通信方式 クライアントサーバー</a:t>
-            </a:r>
-          </a:p>
-        </p:txBody>
-      </p:sp>
-      <p:sp>
-        <p:nvSpPr>
-          <p:cNvPr id="6" name="テキスト ボックス 5">
-            <a:extLst>
-              <a:ext uri="{FF2B5EF4-FFF2-40B4-BE49-F238E27FC236}">
-                <a16:creationId xmlns:a16="http://schemas.microsoft.com/office/drawing/2014/main" id="{55830AD6-028B-4C4E-80BF-B70DFC1C3A46}"/>
-              </a:ext>
-            </a:extLst>
-          </p:cNvPr>
-          <p:cNvSpPr txBox="1"/>
-          <p:nvPr/>
-        </p:nvSpPr>
-        <p:spPr>
-          <a:xfrm>
-            <a:off x="567542" y="1216429"/>
-            <a:ext cx="9725739" cy="1569660"/>
-          </a:xfrm>
-          <a:prstGeom prst="rect">
-            <a:avLst/>
-          </a:prstGeom>
-          <a:noFill/>
-        </p:spPr>
-        <p:txBody>
-          <a:bodyPr wrap="none" rtlCol="0">
-            <a:spAutoFit/>
-          </a:bodyPr>
-          <a:lstStyle/>
-          <a:p>
-            <a:r>
-              <a:rPr kumimoji="1" lang="ja-JP" altLang="en-US" sz="2400" b="1" dirty="0">
-                <a:solidFill>
-                  <a:srgbClr val="FF0000"/>
-                </a:solidFill>
-              </a:rPr>
-              <a:t>クライアントサーバー方式</a:t>
-            </a:r>
-            <a:r>
-              <a:rPr kumimoji="1" lang="ja-JP" altLang="en-US" sz="2400" dirty="0"/>
-              <a:t>は</a:t>
-            </a:r>
-            <a:r>
-              <a:rPr kumimoji="1" lang="ja-JP" altLang="en-US" sz="2400" b="1" dirty="0">
-                <a:solidFill>
-                  <a:srgbClr val="FF0000"/>
-                </a:solidFill>
-              </a:rPr>
-              <a:t>サーバーを用意して通信する方式</a:t>
-            </a:r>
-            <a:r>
-              <a:rPr kumimoji="1" lang="ja-JP" altLang="en-US" sz="2400" dirty="0"/>
-              <a:t>です。</a:t>
-            </a:r>
-            <a:endParaRPr kumimoji="1" lang="en-US" altLang="ja-JP" sz="2400" dirty="0"/>
-          </a:p>
-          <a:p>
-            <a:r>
-              <a:rPr lang="ja-JP" altLang="en-US" sz="2400" b="1" dirty="0">
-                <a:solidFill>
-                  <a:srgbClr val="FF0000"/>
-                </a:solidFill>
-              </a:rPr>
-              <a:t>サーバーには必ず正しいデータが格納</a:t>
-            </a:r>
-            <a:r>
-              <a:rPr lang="ja-JP" altLang="en-US" sz="2400" dirty="0"/>
-              <a:t>されており、</a:t>
-            </a:r>
-            <a:endParaRPr lang="en-US" altLang="ja-JP" sz="2400" dirty="0"/>
-          </a:p>
-          <a:p>
-            <a:r>
-              <a:rPr kumimoji="1" lang="ja-JP" altLang="en-US" sz="2400" dirty="0"/>
-              <a:t>そのデータを各クライアントに送信します。</a:t>
-            </a:r>
-            <a:endParaRPr kumimoji="1" lang="en-US" altLang="ja-JP" sz="2400" dirty="0"/>
-          </a:p>
-          <a:p>
-            <a:r>
-              <a:rPr lang="ja-JP" altLang="en-US" sz="2400" dirty="0"/>
-              <a:t>主に</a:t>
-            </a:r>
-            <a:r>
-              <a:rPr lang="ja-JP" altLang="en-US" sz="2400" b="1" dirty="0">
-                <a:solidFill>
-                  <a:srgbClr val="FF0000"/>
-                </a:solidFill>
-              </a:rPr>
-              <a:t>多人数参加型のゲーム</a:t>
-            </a:r>
-            <a:r>
-              <a:rPr lang="ja-JP" altLang="en-US" sz="2400" dirty="0"/>
-              <a:t>（</a:t>
-            </a:r>
-            <a:r>
-              <a:rPr lang="en-US" altLang="ja-JP" sz="2400" dirty="0"/>
-              <a:t>TPS</a:t>
-            </a:r>
-            <a:r>
-              <a:rPr lang="ja-JP" altLang="en-US" sz="2400" dirty="0"/>
-              <a:t>、</a:t>
-            </a:r>
-            <a:r>
-              <a:rPr lang="en-US" altLang="ja-JP" sz="2400" dirty="0"/>
-              <a:t>FPS</a:t>
-            </a:r>
-            <a:r>
-              <a:rPr lang="ja-JP" altLang="en-US" sz="2400" dirty="0"/>
-              <a:t>など）で採用されます。</a:t>
+              <a:t>それを全てのクライアントに共有する方式です。</a:t>
             </a:r>
             <a:endParaRPr kumimoji="1" lang="en-US" altLang="ja-JP" sz="2400" dirty="0"/>
           </a:p>
@@ -5057,10 +4076,10 @@
       </p:sp>
       <p:grpSp>
         <p:nvGrpSpPr>
-          <p:cNvPr id="3" name="グループ化 2">
-            <a:extLst>
-              <a:ext uri="{FF2B5EF4-FFF2-40B4-BE49-F238E27FC236}">
-                <a16:creationId xmlns:a16="http://schemas.microsoft.com/office/drawing/2014/main" id="{5D8C9E62-AC96-4FAB-B2F8-86F1EE6466E6}"/>
+          <p:cNvPr id="13" name="グループ化 12">
+            <a:extLst>
+              <a:ext uri="{FF2B5EF4-FFF2-40B4-BE49-F238E27FC236}">
+                <a16:creationId xmlns:a16="http://schemas.microsoft.com/office/drawing/2014/main" id="{4E6FE0EE-CF40-4841-8A50-BD3A32F61778}"/>
               </a:ext>
             </a:extLst>
           </p:cNvPr>
@@ -5069,7 +4088,7 @@
         </p:nvGrpSpPr>
         <p:grpSpPr>
           <a:xfrm>
-            <a:off x="567542" y="2925789"/>
+            <a:off x="567542" y="2675581"/>
             <a:ext cx="6221038" cy="3531324"/>
             <a:chOff x="1013480" y="2641364"/>
             <a:chExt cx="6966918" cy="4063466"/>
@@ -5077,10 +4096,10 @@
         </p:grpSpPr>
         <p:sp>
           <p:nvSpPr>
-            <p:cNvPr id="5" name="二等辺三角形 4">
+            <p:cNvPr id="14" name="二等辺三角形 13">
               <a:extLst>
                 <a:ext uri="{FF2B5EF4-FFF2-40B4-BE49-F238E27FC236}">
-                  <a16:creationId xmlns:a16="http://schemas.microsoft.com/office/drawing/2014/main" id="{F8AE2564-9C06-4CC7-BBA5-01BEBFA50536}"/>
+                  <a16:creationId xmlns:a16="http://schemas.microsoft.com/office/drawing/2014/main" id="{60C79EFC-BA88-4407-B8C0-BB6DAB1809FD}"/>
                 </a:ext>
               </a:extLst>
             </p:cNvPr>
@@ -5123,10 +4142,10 @@
         </p:sp>
         <p:sp>
           <p:nvSpPr>
-            <p:cNvPr id="7" name="正方形/長方形 6">
+            <p:cNvPr id="15" name="正方形/長方形 14">
               <a:extLst>
                 <a:ext uri="{FF2B5EF4-FFF2-40B4-BE49-F238E27FC236}">
-                  <a16:creationId xmlns:a16="http://schemas.microsoft.com/office/drawing/2014/main" id="{DA6568F9-232A-4A7E-83DB-3FD8852BF368}"/>
+                  <a16:creationId xmlns:a16="http://schemas.microsoft.com/office/drawing/2014/main" id="{18A0F585-66F0-46E5-9E13-E5E5C181E7AA}"/>
                 </a:ext>
               </a:extLst>
             </p:cNvPr>
@@ -5170,10 +4189,10 @@
         </p:sp>
         <p:sp>
           <p:nvSpPr>
-            <p:cNvPr id="8" name="スマイル 7">
+            <p:cNvPr id="16" name="スマイル 15">
               <a:extLst>
                 <a:ext uri="{FF2B5EF4-FFF2-40B4-BE49-F238E27FC236}">
-                  <a16:creationId xmlns:a16="http://schemas.microsoft.com/office/drawing/2014/main" id="{B19C6A8D-2B38-4F13-B3C4-30CF59E67DB2}"/>
+                  <a16:creationId xmlns:a16="http://schemas.microsoft.com/office/drawing/2014/main" id="{51CB8563-C771-4DD5-B3D4-1ACD4A8ED56E}"/>
                 </a:ext>
               </a:extLst>
             </p:cNvPr>
@@ -5216,10 +4235,10 @@
         </p:sp>
         <p:sp>
           <p:nvSpPr>
-            <p:cNvPr id="9" name="スマイル 8">
+            <p:cNvPr id="17" name="スマイル 16">
               <a:extLst>
                 <a:ext uri="{FF2B5EF4-FFF2-40B4-BE49-F238E27FC236}">
-                  <a16:creationId xmlns:a16="http://schemas.microsoft.com/office/drawing/2014/main" id="{D4382F14-BE54-462F-BACF-8F1B52492FE6}"/>
+                  <a16:creationId xmlns:a16="http://schemas.microsoft.com/office/drawing/2014/main" id="{A47C7187-F0D9-4BEB-90E6-E0C0482934C4}"/>
                 </a:ext>
               </a:extLst>
             </p:cNvPr>
@@ -5270,10 +4289,10 @@
         </p:sp>
         <p:sp>
           <p:nvSpPr>
-            <p:cNvPr id="10" name="二等辺三角形 9">
+            <p:cNvPr id="18" name="二等辺三角形 17">
               <a:extLst>
                 <a:ext uri="{FF2B5EF4-FFF2-40B4-BE49-F238E27FC236}">
-                  <a16:creationId xmlns:a16="http://schemas.microsoft.com/office/drawing/2014/main" id="{D082CFF6-6A9A-43C3-A36D-897424BB5E8F}"/>
+                  <a16:creationId xmlns:a16="http://schemas.microsoft.com/office/drawing/2014/main" id="{4FE99688-6C90-44CC-BE3D-0E93BA52B388}"/>
                 </a:ext>
               </a:extLst>
             </p:cNvPr>
@@ -5316,10 +4335,10 @@
         </p:sp>
         <p:sp>
           <p:nvSpPr>
-            <p:cNvPr id="11" name="正方形/長方形 10">
+            <p:cNvPr id="19" name="正方形/長方形 18">
               <a:extLst>
                 <a:ext uri="{FF2B5EF4-FFF2-40B4-BE49-F238E27FC236}">
-                  <a16:creationId xmlns:a16="http://schemas.microsoft.com/office/drawing/2014/main" id="{BAC039B1-C514-4297-AD9D-0BFD75C854C8}"/>
+                  <a16:creationId xmlns:a16="http://schemas.microsoft.com/office/drawing/2014/main" id="{4208CF93-E274-4FB3-9DD0-04725278EEA0}"/>
                 </a:ext>
               </a:extLst>
             </p:cNvPr>
@@ -5363,10 +4382,10 @@
         </p:sp>
         <p:sp>
           <p:nvSpPr>
-            <p:cNvPr id="12" name="スマイル 11">
+            <p:cNvPr id="20" name="スマイル 19">
               <a:extLst>
                 <a:ext uri="{FF2B5EF4-FFF2-40B4-BE49-F238E27FC236}">
-                  <a16:creationId xmlns:a16="http://schemas.microsoft.com/office/drawing/2014/main" id="{B95B12D7-F5DD-4BE6-BE77-23016009DAD9}"/>
+                  <a16:creationId xmlns:a16="http://schemas.microsoft.com/office/drawing/2014/main" id="{1DDDB3E3-F662-40E8-AC27-E09A86CF12A9}"/>
                 </a:ext>
               </a:extLst>
             </p:cNvPr>
@@ -5409,10 +4428,10 @@
         </p:sp>
         <p:sp>
           <p:nvSpPr>
-            <p:cNvPr id="13" name="スマイル 12">
+            <p:cNvPr id="21" name="スマイル 20">
               <a:extLst>
                 <a:ext uri="{FF2B5EF4-FFF2-40B4-BE49-F238E27FC236}">
-                  <a16:creationId xmlns:a16="http://schemas.microsoft.com/office/drawing/2014/main" id="{4714BF1B-58C7-4310-B86E-9D6B680101FC}"/>
+                  <a16:creationId xmlns:a16="http://schemas.microsoft.com/office/drawing/2014/main" id="{5013AA04-17F6-438D-9DEE-5DD2323B10FA}"/>
                 </a:ext>
               </a:extLst>
             </p:cNvPr>
@@ -5463,10 +4482,10 @@
         </p:sp>
         <p:sp>
           <p:nvSpPr>
-            <p:cNvPr id="14" name="テキスト ボックス 13">
+            <p:cNvPr id="22" name="テキスト ボックス 21">
               <a:extLst>
                 <a:ext uri="{FF2B5EF4-FFF2-40B4-BE49-F238E27FC236}">
-                  <a16:creationId xmlns:a16="http://schemas.microsoft.com/office/drawing/2014/main" id="{EB72EFE6-D599-4453-8F92-5D71A56F3F8A}"/>
+                  <a16:creationId xmlns:a16="http://schemas.microsoft.com/office/drawing/2014/main" id="{E5423C64-14AE-4CCB-871E-CECAE7A40B01}"/>
                 </a:ext>
               </a:extLst>
             </p:cNvPr>
@@ -5499,10 +4518,10 @@
         </p:sp>
         <p:sp>
           <p:nvSpPr>
-            <p:cNvPr id="15" name="テキスト ボックス 14">
+            <p:cNvPr id="23" name="テキスト ボックス 22">
               <a:extLst>
                 <a:ext uri="{FF2B5EF4-FFF2-40B4-BE49-F238E27FC236}">
-                  <a16:creationId xmlns:a16="http://schemas.microsoft.com/office/drawing/2014/main" id="{04359DE7-3DE6-4779-9938-7BAB5AF4A392}"/>
+                  <a16:creationId xmlns:a16="http://schemas.microsoft.com/office/drawing/2014/main" id="{E634516A-8739-4C60-B238-9501CEE8756F}"/>
                 </a:ext>
               </a:extLst>
             </p:cNvPr>
@@ -5535,10 +4554,10 @@
         </p:sp>
         <p:sp>
           <p:nvSpPr>
-            <p:cNvPr id="2" name="矢印: 左右 1">
+            <p:cNvPr id="24" name="矢印: 左右 23">
               <a:extLst>
                 <a:ext uri="{FF2B5EF4-FFF2-40B4-BE49-F238E27FC236}">
-                  <a16:creationId xmlns:a16="http://schemas.microsoft.com/office/drawing/2014/main" id="{F641EFCF-EF63-4B67-990C-78C3A95D0D12}"/>
+                  <a16:creationId xmlns:a16="http://schemas.microsoft.com/office/drawing/2014/main" id="{CEACF86E-233A-44DF-8503-82D76AA8FE1F}"/>
                 </a:ext>
               </a:extLst>
             </p:cNvPr>
@@ -5584,10 +4603,10 @@
         </p:sp>
         <p:grpSp>
           <p:nvGrpSpPr>
-            <p:cNvPr id="16" name="グループ化 15">
+            <p:cNvPr id="25" name="グループ化 24">
               <a:extLst>
                 <a:ext uri="{FF2B5EF4-FFF2-40B4-BE49-F238E27FC236}">
-                  <a16:creationId xmlns:a16="http://schemas.microsoft.com/office/drawing/2014/main" id="{ADE41BDB-C44D-45C2-A121-E43AD5B0D71A}"/>
+                  <a16:creationId xmlns:a16="http://schemas.microsoft.com/office/drawing/2014/main" id="{960EDF7E-DAFE-48B6-A384-F4FD602022E4}"/>
                 </a:ext>
               </a:extLst>
             </p:cNvPr>
@@ -5604,10 +4623,10 @@
           </p:grpSpPr>
           <p:sp>
             <p:nvSpPr>
-              <p:cNvPr id="17" name="直方体 16">
+              <p:cNvPr id="27" name="直方体 26">
                 <a:extLst>
                   <a:ext uri="{FF2B5EF4-FFF2-40B4-BE49-F238E27FC236}">
-                    <a16:creationId xmlns:a16="http://schemas.microsoft.com/office/drawing/2014/main" id="{40559FB0-468E-4B3A-BDF1-267BE3B6FA28}"/>
+                    <a16:creationId xmlns:a16="http://schemas.microsoft.com/office/drawing/2014/main" id="{CEFB3C98-2B17-4176-B077-447B775BEE49}"/>
                   </a:ext>
                 </a:extLst>
               </p:cNvPr>
@@ -5650,10 +4669,10 @@
           </p:sp>
           <p:sp>
             <p:nvSpPr>
-              <p:cNvPr id="18" name="テキスト ボックス 17">
+              <p:cNvPr id="28" name="テキスト ボックス 27">
                 <a:extLst>
                   <a:ext uri="{FF2B5EF4-FFF2-40B4-BE49-F238E27FC236}">
-                    <a16:creationId xmlns:a16="http://schemas.microsoft.com/office/drawing/2014/main" id="{187F7EC2-B2D3-4B82-9A15-EA633FC3D772}"/>
+                    <a16:creationId xmlns:a16="http://schemas.microsoft.com/office/drawing/2014/main" id="{5D36CB2E-858D-4D45-9B6A-5C038A76FFE1}"/>
                   </a:ext>
                 </a:extLst>
               </p:cNvPr>
@@ -5695,10 +4714,10 @@
         </p:grpSp>
         <p:sp>
           <p:nvSpPr>
-            <p:cNvPr id="19" name="矢印: 左右 18">
+            <p:cNvPr id="26" name="矢印: 左右 25">
               <a:extLst>
                 <a:ext uri="{FF2B5EF4-FFF2-40B4-BE49-F238E27FC236}">
-                  <a16:creationId xmlns:a16="http://schemas.microsoft.com/office/drawing/2014/main" id="{978B7956-8FC5-4AF0-BF63-36FB18CFA193}"/>
+                  <a16:creationId xmlns:a16="http://schemas.microsoft.com/office/drawing/2014/main" id="{A9A80F3D-3C4A-4C07-9DD9-6513ABF8CE44}"/>
                 </a:ext>
               </a:extLst>
             </p:cNvPr>
@@ -5746,7 +4765,7 @@
     </p:spTree>
     <p:extLst>
       <p:ext uri="{BB962C8B-B14F-4D97-AF65-F5344CB8AC3E}">
-        <p14:creationId xmlns:p14="http://schemas.microsoft.com/office/powerpoint/2010/main" val="3292528400"/>
+        <p14:creationId xmlns:p14="http://schemas.microsoft.com/office/powerpoint/2010/main" val="2282585801"/>
       </p:ext>
     </p:extLst>
   </p:cSld>
@@ -5756,7 +4775,7 @@
 </p:sld>
 </file>
 
-<file path=ppt/slides/slide6.xml><?xml version="1.0" encoding="utf-8"?>
+<file path=ppt/slides/slide3.xml><?xml version="1.0" encoding="utf-8"?>
 <p:sld xmlns:a="http://schemas.openxmlformats.org/drawingml/2006/main" xmlns:r="http://schemas.openxmlformats.org/officeDocument/2006/relationships" xmlns:p="http://schemas.openxmlformats.org/presentationml/2006/main">
   <p:cSld>
     <p:spTree>
@@ -5788,7 +4807,7 @@
         <p:spPr>
           <a:xfrm>
             <a:off x="567542" y="491954"/>
-            <a:ext cx="6046848" cy="584775"/>
+            <a:ext cx="5711820" cy="584775"/>
           </a:xfrm>
           <a:prstGeom prst="rect">
             <a:avLst/>
@@ -5803,7 +4822,15 @@
           <a:p>
             <a:r>
               <a:rPr kumimoji="1" lang="ja-JP" altLang="en-US" sz="3200" b="1" u="sng" dirty="0"/>
-              <a:t>通信方式 クライアントサーバー</a:t>
+              <a:t>チャットプログラム</a:t>
+            </a:r>
+            <a:r>
+              <a:rPr kumimoji="1" lang="en-US" altLang="ja-JP" sz="3200" b="1" u="sng" dirty="0"/>
+              <a:t>(CS) </a:t>
+            </a:r>
+            <a:r>
+              <a:rPr kumimoji="1" lang="ja-JP" altLang="en-US" sz="3200" b="1" u="sng" dirty="0"/>
+              <a:t>復習</a:t>
             </a:r>
           </a:p>
         </p:txBody>
@@ -5823,7 +4850,7 @@
         <p:spPr>
           <a:xfrm>
             <a:off x="567542" y="1216429"/>
-            <a:ext cx="10865475" cy="5262979"/>
+            <a:ext cx="10649069" cy="830997"/>
           </a:xfrm>
           <a:prstGeom prst="rect">
             <a:avLst/>
@@ -5837,143 +4864,124 @@
           <a:lstStyle/>
           <a:p>
             <a:r>
-              <a:rPr kumimoji="1" lang="ja-JP" altLang="en-US" sz="2400" dirty="0"/>
-              <a:t>クライアントサーバー方式のメリットとデメリットです</a:t>
-            </a:r>
-            <a:endParaRPr kumimoji="1" lang="en-US" altLang="ja-JP" sz="2400" dirty="0"/>
-          </a:p>
-          <a:p>
-            <a:endParaRPr kumimoji="1" lang="en-US" altLang="ja-JP" sz="2400" dirty="0"/>
-          </a:p>
-          <a:p>
-            <a:r>
-              <a:rPr lang="ja-JP" altLang="en-US" sz="2400" b="1" dirty="0">
-                <a:solidFill>
-                  <a:srgbClr val="FF0000"/>
-                </a:solidFill>
-              </a:rPr>
-              <a:t>■メリット</a:t>
-            </a:r>
-            <a:endParaRPr lang="en-US" altLang="ja-JP" sz="2400" b="1" dirty="0">
-              <a:solidFill>
-                <a:srgbClr val="FF0000"/>
-              </a:solidFill>
-            </a:endParaRPr>
-          </a:p>
-          <a:p>
-            <a:r>
-              <a:rPr kumimoji="1" lang="ja-JP" altLang="en-US" sz="2400" dirty="0"/>
-              <a:t>・</a:t>
-            </a:r>
-            <a:r>
               <a:rPr lang="ja-JP" altLang="en-US" sz="2400" dirty="0"/>
-              <a:t>常に正しい情報がサーバーにある</a:t>
-            </a:r>
-            <a:endParaRPr kumimoji="1" lang="en-US" altLang="ja-JP" sz="2400" dirty="0"/>
+              <a:t>サーバーからは全ての正しいデータが送られます。</a:t>
+            </a:r>
+            <a:endParaRPr lang="en-US" altLang="ja-JP" sz="2400" dirty="0"/>
           </a:p>
           <a:p>
             <a:r>
               <a:rPr lang="ja-JP" altLang="en-US" sz="2400" dirty="0"/>
-              <a:t>　・同期ずれのリスクが低い</a:t>
+              <a:t>つまり、チャットの全メッセージを全クライアントに送ることになります。</a:t>
             </a:r>
             <a:endParaRPr lang="en-US" altLang="ja-JP" sz="2400" dirty="0"/>
           </a:p>
-          <a:p>
-            <a:r>
-              <a:rPr kumimoji="1" lang="ja-JP" altLang="en-US" sz="2400" dirty="0"/>
-              <a:t>　・クライアント側のチートをサーバーで検知できる</a:t>
-            </a:r>
-            <a:endParaRPr kumimoji="1" lang="en-US" altLang="ja-JP" sz="2400" dirty="0"/>
-          </a:p>
+        </p:txBody>
+      </p:sp>
+      <p:pic>
+        <p:nvPicPr>
+          <p:cNvPr id="29" name="図 28">
+            <a:extLst>
+              <a:ext uri="{FF2B5EF4-FFF2-40B4-BE49-F238E27FC236}">
+                <a16:creationId xmlns:a16="http://schemas.microsoft.com/office/drawing/2014/main" id="{5BF62AE9-CBFC-43D2-A9A0-0E82C85DAE95}"/>
+              </a:ext>
+            </a:extLst>
+          </p:cNvPr>
+          <p:cNvPicPr>
+            <a:picLocks noChangeAspect="1"/>
+          </p:cNvPicPr>
+          <p:nvPr/>
+        </p:nvPicPr>
+        <p:blipFill>
+          <a:blip r:embed="rId2"/>
+          <a:stretch>
+            <a:fillRect/>
+          </a:stretch>
+        </p:blipFill>
+        <p:spPr>
+          <a:xfrm>
+            <a:off x="567542" y="2187126"/>
+            <a:ext cx="3895607" cy="3316095"/>
+          </a:xfrm>
+          <a:prstGeom prst="rect">
+            <a:avLst/>
+          </a:prstGeom>
+        </p:spPr>
+      </p:pic>
+      <p:sp>
+        <p:nvSpPr>
+          <p:cNvPr id="30" name="テキスト ボックス 29">
+            <a:extLst>
+              <a:ext uri="{FF2B5EF4-FFF2-40B4-BE49-F238E27FC236}">
+                <a16:creationId xmlns:a16="http://schemas.microsoft.com/office/drawing/2014/main" id="{440D3834-5562-4671-9D20-777C0BA436AB}"/>
+              </a:ext>
+            </a:extLst>
+          </p:cNvPr>
+          <p:cNvSpPr txBox="1"/>
+          <p:nvPr/>
+        </p:nvSpPr>
+        <p:spPr>
+          <a:xfrm>
+            <a:off x="763002" y="4348910"/>
+            <a:ext cx="4185761" cy="461665"/>
+          </a:xfrm>
+          <a:prstGeom prst="rect">
+            <a:avLst/>
+          </a:prstGeom>
+          <a:solidFill>
+            <a:schemeClr val="bg1"/>
+          </a:solidFill>
+          <a:ln>
+            <a:solidFill>
+              <a:srgbClr val="FF0000"/>
+            </a:solidFill>
+          </a:ln>
+        </p:spPr>
+        <p:txBody>
+          <a:bodyPr wrap="none" rtlCol="0">
+            <a:spAutoFit/>
+          </a:bodyPr>
+          <a:lstStyle/>
           <a:p>
             <a:r>
               <a:rPr lang="ja-JP" altLang="en-US" sz="2400" dirty="0"/>
-              <a:t>　・データを集計することができる</a:t>
+              <a:t>この内容を全クライアントへ</a:t>
             </a:r>
             <a:endParaRPr lang="en-US" altLang="ja-JP" sz="2400" dirty="0"/>
           </a:p>
-          <a:p>
-            <a:r>
-              <a:rPr kumimoji="1" lang="ja-JP" altLang="en-US" sz="2400" dirty="0"/>
-              <a:t>　・複数クライアントの対応が簡単</a:t>
-            </a:r>
-            <a:endParaRPr kumimoji="1" lang="en-US" altLang="ja-JP" sz="2400" dirty="0"/>
-          </a:p>
-          <a:p>
-            <a:endParaRPr kumimoji="1" lang="en-US" altLang="ja-JP" sz="2400" dirty="0"/>
-          </a:p>
-          <a:p>
-            <a:r>
-              <a:rPr lang="ja-JP" altLang="en-US" sz="2400" b="1" dirty="0">
-                <a:solidFill>
-                  <a:srgbClr val="0070C0"/>
-                </a:solidFill>
-              </a:rPr>
-              <a:t>■デメリット</a:t>
-            </a:r>
-            <a:endParaRPr lang="en-US" altLang="ja-JP" sz="2400" b="1" dirty="0">
-              <a:solidFill>
-                <a:srgbClr val="0070C0"/>
-              </a:solidFill>
-            </a:endParaRPr>
-          </a:p>
-          <a:p>
-            <a:r>
-              <a:rPr lang="ja-JP" altLang="en-US" sz="2400" dirty="0"/>
-              <a:t>・サーバー側の開発と、クライアント、サーバー間の連携が必要（</a:t>
-            </a:r>
-            <a:r>
-              <a:rPr lang="en-US" altLang="ja-JP" sz="2400" b="1" dirty="0">
-                <a:solidFill>
-                  <a:srgbClr val="FF0000"/>
-                </a:solidFill>
-              </a:rPr>
-              <a:t>API</a:t>
-            </a:r>
-            <a:r>
-              <a:rPr lang="ja-JP" altLang="en-US" sz="2400" b="1" dirty="0">
-                <a:solidFill>
-                  <a:srgbClr val="FF0000"/>
-                </a:solidFill>
-              </a:rPr>
-              <a:t>開発</a:t>
-            </a:r>
-            <a:r>
-              <a:rPr lang="ja-JP" altLang="en-US" sz="2400" dirty="0"/>
-              <a:t>）</a:t>
-            </a:r>
-            <a:endParaRPr lang="en-US" altLang="ja-JP" sz="2400" dirty="0"/>
-          </a:p>
-          <a:p>
-            <a:r>
-              <a:rPr lang="ja-JP" altLang="en-US" sz="2400" dirty="0"/>
-              <a:t>・サーバーを経由するため通信が遅い（</a:t>
-            </a:r>
-            <a:r>
-              <a:rPr lang="ja-JP" altLang="en-US" sz="2400" b="1" dirty="0">
-                <a:solidFill>
-                  <a:srgbClr val="FF0000"/>
-                </a:solidFill>
-              </a:rPr>
-              <a:t>レイテンシ問題</a:t>
-            </a:r>
-            <a:r>
-              <a:rPr lang="ja-JP" altLang="en-US" sz="2400" dirty="0"/>
-              <a:t>）</a:t>
-            </a:r>
-            <a:endParaRPr lang="en-US" altLang="ja-JP" sz="2400" dirty="0"/>
-          </a:p>
-          <a:p>
-            <a:r>
-              <a:rPr lang="ja-JP" altLang="en-US" sz="2400" dirty="0"/>
-              <a:t>・サーバーに問題が発生すると全クライアントが使用できなくなる</a:t>
-            </a:r>
-            <a:endParaRPr lang="en-US" altLang="ja-JP" sz="2400" dirty="0"/>
-          </a:p>
-          <a:p>
-            <a:r>
-              <a:rPr lang="ja-JP" altLang="en-US" sz="2400" dirty="0"/>
-              <a:t>・デバッグが大変（クライアント側？サーバー側？）</a:t>
+        </p:txBody>
+      </p:sp>
+      <p:sp>
+        <p:nvSpPr>
+          <p:cNvPr id="31" name="テキスト ボックス 30">
+            <a:extLst>
+              <a:ext uri="{FF2B5EF4-FFF2-40B4-BE49-F238E27FC236}">
+                <a16:creationId xmlns:a16="http://schemas.microsoft.com/office/drawing/2014/main" id="{8A95FF85-AF5C-4713-91BE-1A0C958EE87F}"/>
+              </a:ext>
+            </a:extLst>
+          </p:cNvPr>
+          <p:cNvSpPr txBox="1"/>
+          <p:nvPr/>
+        </p:nvSpPr>
+        <p:spPr>
+          <a:xfrm>
+            <a:off x="567542" y="5641571"/>
+            <a:ext cx="5416868" cy="461665"/>
+          </a:xfrm>
+          <a:prstGeom prst="rect">
+            <a:avLst/>
+          </a:prstGeom>
+          <a:noFill/>
+        </p:spPr>
+        <p:txBody>
+          <a:bodyPr wrap="none" rtlCol="0">
+            <a:spAutoFit/>
+          </a:bodyPr>
+          <a:lstStyle/>
+          <a:p>
+            <a:r>
+              <a:rPr lang="ja-JP" altLang="en-US" sz="2400"/>
+              <a:t>以上を踏まえて練習してみましょう。</a:t>
             </a:r>
             <a:endParaRPr lang="en-US" altLang="ja-JP" sz="2400" dirty="0"/>
           </a:p>
@@ -5982,7 +4990,7 @@
     </p:spTree>
     <p:extLst>
       <p:ext uri="{BB962C8B-B14F-4D97-AF65-F5344CB8AC3E}">
-        <p14:creationId xmlns:p14="http://schemas.microsoft.com/office/powerpoint/2010/main" val="1793864305"/>
+        <p14:creationId xmlns:p14="http://schemas.microsoft.com/office/powerpoint/2010/main" val="1610591356"/>
       </p:ext>
     </p:extLst>
   </p:cSld>
@@ -5992,7 +5000,7 @@
 </p:sld>
 </file>
 
-<file path=ppt/slides/slide7.xml><?xml version="1.0" encoding="utf-8"?>
+<file path=ppt/slides/slide4.xml><?xml version="1.0" encoding="utf-8"?>
 <p:sld xmlns:a="http://schemas.openxmlformats.org/drawingml/2006/main" xmlns:r="http://schemas.openxmlformats.org/officeDocument/2006/relationships" xmlns:p="http://schemas.openxmlformats.org/presentationml/2006/main">
   <p:cSld>
     <p:spTree>
@@ -6024,7 +5032,7 @@
         <p:spPr>
           <a:xfrm>
             <a:off x="567542" y="491954"/>
-            <a:ext cx="2746265" cy="584775"/>
+            <a:ext cx="4774064" cy="584775"/>
           </a:xfrm>
           <a:prstGeom prst="rect">
             <a:avLst/>
@@ -6039,11 +5047,11 @@
           <a:p>
             <a:r>
               <a:rPr kumimoji="1" lang="ja-JP" altLang="en-US" sz="3200" b="1" u="sng" dirty="0"/>
-              <a:t>通信方式 </a:t>
+              <a:t>チャットプログラム</a:t>
             </a:r>
             <a:r>
               <a:rPr kumimoji="1" lang="en-US" altLang="ja-JP" sz="3200" b="1" u="sng" dirty="0"/>
-              <a:t>P2P</a:t>
+              <a:t>(CS)</a:t>
             </a:r>
             <a:endParaRPr kumimoji="1" lang="ja-JP" altLang="en-US" sz="3200" b="1" u="sng" dirty="0"/>
           </a:p>
@@ -6064,7 +5072,7 @@
         <p:spPr>
           <a:xfrm>
             <a:off x="567542" y="1216429"/>
-            <a:ext cx="10033516" cy="2677656"/>
+            <a:ext cx="5463355" cy="461665"/>
           </a:xfrm>
           <a:prstGeom prst="rect">
             <a:avLst/>
@@ -6078,75 +5086,63 @@
           <a:lstStyle/>
           <a:p>
             <a:r>
+              <a:rPr kumimoji="1" lang="en-US" altLang="ja-JP" sz="2400" b="1" dirty="0">
+                <a:solidFill>
+                  <a:srgbClr val="7030A0"/>
+                </a:solidFill>
+              </a:rPr>
+              <a:t>Server</a:t>
+            </a:r>
+            <a:r>
+              <a:rPr kumimoji="1" lang="ja-JP" altLang="en-US" sz="2400" b="1" dirty="0">
+                <a:solidFill>
+                  <a:srgbClr val="7030A0"/>
+                </a:solidFill>
+              </a:rPr>
+              <a:t>プロジェクト</a:t>
+            </a:r>
+            <a:r>
               <a:rPr lang="ja-JP" altLang="en-US" sz="2400" dirty="0"/>
-              <a:t>今回紹介したのは基礎的な方式です。</a:t>
-            </a:r>
-            <a:endParaRPr lang="en-US" altLang="ja-JP" sz="2400" dirty="0"/>
-          </a:p>
-          <a:p>
-            <a:r>
-              <a:rPr lang="ja-JP" altLang="en-US" sz="2400" dirty="0"/>
-              <a:t>もしも興味がありましたら、これらから派生した以下の方式についても</a:t>
-            </a:r>
-            <a:endParaRPr lang="en-US" altLang="ja-JP" sz="2400" dirty="0"/>
-          </a:p>
-          <a:p>
-            <a:r>
-              <a:rPr lang="ja-JP" altLang="en-US" sz="2400" dirty="0"/>
-              <a:t>調べてみましょう。</a:t>
-            </a:r>
-            <a:endParaRPr lang="en-US" altLang="ja-JP" sz="2400" dirty="0"/>
-          </a:p>
-          <a:p>
-            <a:endParaRPr lang="en-US" altLang="ja-JP" sz="2400" dirty="0"/>
-          </a:p>
-          <a:p>
-            <a:r>
-              <a:rPr lang="ja-JP" altLang="en-US" sz="2400" dirty="0"/>
-              <a:t>・デディケートサーバー方式（</a:t>
-            </a:r>
-            <a:r>
-              <a:rPr lang="en-US" altLang="ja-JP" sz="2400" dirty="0"/>
-              <a:t>MMO</a:t>
-            </a:r>
-            <a:r>
-              <a:rPr lang="ja-JP" altLang="en-US" sz="2400" dirty="0"/>
-              <a:t>系）</a:t>
-            </a:r>
-            <a:endParaRPr lang="en-US" altLang="ja-JP" sz="2400" dirty="0"/>
-          </a:p>
-          <a:p>
-            <a:r>
-              <a:rPr lang="ja-JP" altLang="en-US" sz="2400" dirty="0"/>
-              <a:t>・</a:t>
-            </a:r>
-            <a:r>
-              <a:rPr lang="en-US" altLang="ja-JP" sz="2400" dirty="0"/>
-              <a:t>Listen</a:t>
-            </a:r>
-            <a:r>
-              <a:rPr lang="ja-JP" altLang="en-US" sz="2400" dirty="0"/>
-              <a:t>サーバー方式（モンハンなど少人数協力系）</a:t>
-            </a:r>
-            <a:endParaRPr lang="en-US" altLang="ja-JP" sz="2400" dirty="0"/>
-          </a:p>
-          <a:p>
-            <a:r>
-              <a:rPr lang="en-US" altLang="ja-JP" sz="2400" dirty="0"/>
-              <a:t>※</a:t>
-            </a:r>
-            <a:r>
-              <a:rPr lang="ja-JP" altLang="en-US" sz="2400" dirty="0"/>
-              <a:t>ほかにもいろいろあります</a:t>
-            </a:r>
-            <a:endParaRPr lang="en-US" altLang="ja-JP" sz="2400" dirty="0"/>
-          </a:p>
-        </p:txBody>
-      </p:sp>
+              <a:t>を開きましょう。</a:t>
+            </a:r>
+            <a:endParaRPr kumimoji="1" lang="en-US" altLang="ja-JP" sz="2400" dirty="0"/>
+          </a:p>
+        </p:txBody>
+      </p:sp>
+      <p:pic>
+        <p:nvPicPr>
+          <p:cNvPr id="5" name="図 4">
+            <a:extLst>
+              <a:ext uri="{FF2B5EF4-FFF2-40B4-BE49-F238E27FC236}">
+                <a16:creationId xmlns:a16="http://schemas.microsoft.com/office/drawing/2014/main" id="{013B974F-D4AD-4764-80E6-9FD4B5C0649E}"/>
+              </a:ext>
+            </a:extLst>
+          </p:cNvPr>
+          <p:cNvPicPr>
+            <a:picLocks noChangeAspect="1"/>
+          </p:cNvPicPr>
+          <p:nvPr/>
+        </p:nvPicPr>
+        <p:blipFill>
+          <a:blip r:embed="rId2"/>
+          <a:stretch>
+            <a:fillRect/>
+          </a:stretch>
+        </p:blipFill>
+        <p:spPr>
+          <a:xfrm>
+            <a:off x="567542" y="1817794"/>
+            <a:ext cx="8755752" cy="4706217"/>
+          </a:xfrm>
+          <a:prstGeom prst="rect">
+            <a:avLst/>
+          </a:prstGeom>
+        </p:spPr>
+      </p:pic>
     </p:spTree>
     <p:extLst>
       <p:ext uri="{BB962C8B-B14F-4D97-AF65-F5344CB8AC3E}">
-        <p14:creationId xmlns:p14="http://schemas.microsoft.com/office/powerpoint/2010/main" val="503993105"/>
+        <p14:creationId xmlns:p14="http://schemas.microsoft.com/office/powerpoint/2010/main" val="4272898341"/>
       </p:ext>
     </p:extLst>
   </p:cSld>

--- a/ゲーム科3年/00_前期/オンラインゲームプログラミングⅠ/05_チャットプログラム(CS).pptx
+++ b/ゲーム科3年/00_前期/オンラインゲームプログラミングⅠ/05_チャットプログラム(CS).pptx
@@ -8,7 +8,14 @@
     <p:sldId id="256" r:id="rId2"/>
     <p:sldId id="257" r:id="rId3"/>
     <p:sldId id="259" r:id="rId4"/>
-    <p:sldId id="258" r:id="rId5"/>
+    <p:sldId id="261" r:id="rId5"/>
+    <p:sldId id="258" r:id="rId6"/>
+    <p:sldId id="262" r:id="rId7"/>
+    <p:sldId id="263" r:id="rId8"/>
+    <p:sldId id="264" r:id="rId9"/>
+    <p:sldId id="265" r:id="rId10"/>
+    <p:sldId id="266" r:id="rId11"/>
+    <p:sldId id="267" r:id="rId12"/>
   </p:sldIdLst>
   <p:sldSz cx="12192000" cy="6858000"/>
   <p:notesSz cx="6858000" cy="9144000"/>
@@ -262,7 +269,7 @@
           <a:p>
             <a:fld id="{E9CC885B-4903-4D54-9A93-00025F12DED9}" type="datetimeFigureOut">
               <a:rPr kumimoji="1" lang="ja-JP" altLang="en-US" smtClean="0"/>
-              <a:t>2025/10/9</a:t>
+              <a:t>2025/10/10</a:t>
             </a:fld>
             <a:endParaRPr kumimoji="1" lang="ja-JP" altLang="en-US"/>
           </a:p>
@@ -492,7 +499,7 @@
           <a:p>
             <a:fld id="{E9CC885B-4903-4D54-9A93-00025F12DED9}" type="datetimeFigureOut">
               <a:rPr kumimoji="1" lang="ja-JP" altLang="en-US" smtClean="0"/>
-              <a:t>2025/10/9</a:t>
+              <a:t>2025/10/10</a:t>
             </a:fld>
             <a:endParaRPr kumimoji="1" lang="ja-JP" altLang="en-US"/>
           </a:p>
@@ -732,7 +739,7 @@
           <a:p>
             <a:fld id="{E9CC885B-4903-4D54-9A93-00025F12DED9}" type="datetimeFigureOut">
               <a:rPr kumimoji="1" lang="ja-JP" altLang="en-US" smtClean="0"/>
-              <a:t>2025/10/9</a:t>
+              <a:t>2025/10/10</a:t>
             </a:fld>
             <a:endParaRPr kumimoji="1" lang="ja-JP" altLang="en-US"/>
           </a:p>
@@ -962,7 +969,7 @@
           <a:p>
             <a:fld id="{E9CC885B-4903-4D54-9A93-00025F12DED9}" type="datetimeFigureOut">
               <a:rPr kumimoji="1" lang="ja-JP" altLang="en-US" smtClean="0"/>
-              <a:t>2025/10/9</a:t>
+              <a:t>2025/10/10</a:t>
             </a:fld>
             <a:endParaRPr kumimoji="1" lang="ja-JP" altLang="en-US"/>
           </a:p>
@@ -1237,7 +1244,7 @@
           <a:p>
             <a:fld id="{E9CC885B-4903-4D54-9A93-00025F12DED9}" type="datetimeFigureOut">
               <a:rPr kumimoji="1" lang="ja-JP" altLang="en-US" smtClean="0"/>
-              <a:t>2025/10/9</a:t>
+              <a:t>2025/10/10</a:t>
             </a:fld>
             <a:endParaRPr kumimoji="1" lang="ja-JP" altLang="en-US"/>
           </a:p>
@@ -1566,7 +1573,7 @@
           <a:p>
             <a:fld id="{E9CC885B-4903-4D54-9A93-00025F12DED9}" type="datetimeFigureOut">
               <a:rPr kumimoji="1" lang="ja-JP" altLang="en-US" smtClean="0"/>
-              <a:t>2025/10/9</a:t>
+              <a:t>2025/10/10</a:t>
             </a:fld>
             <a:endParaRPr kumimoji="1" lang="ja-JP" altLang="en-US"/>
           </a:p>
@@ -2042,7 +2049,7 @@
           <a:p>
             <a:fld id="{E9CC885B-4903-4D54-9A93-00025F12DED9}" type="datetimeFigureOut">
               <a:rPr kumimoji="1" lang="ja-JP" altLang="en-US" smtClean="0"/>
-              <a:t>2025/10/9</a:t>
+              <a:t>2025/10/10</a:t>
             </a:fld>
             <a:endParaRPr kumimoji="1" lang="ja-JP" altLang="en-US"/>
           </a:p>
@@ -2183,7 +2190,7 @@
           <a:p>
             <a:fld id="{E9CC885B-4903-4D54-9A93-00025F12DED9}" type="datetimeFigureOut">
               <a:rPr kumimoji="1" lang="ja-JP" altLang="en-US" smtClean="0"/>
-              <a:t>2025/10/9</a:t>
+              <a:t>2025/10/10</a:t>
             </a:fld>
             <a:endParaRPr kumimoji="1" lang="ja-JP" altLang="en-US"/>
           </a:p>
@@ -2296,7 +2303,7 @@
           <a:p>
             <a:fld id="{E9CC885B-4903-4D54-9A93-00025F12DED9}" type="datetimeFigureOut">
               <a:rPr kumimoji="1" lang="ja-JP" altLang="en-US" smtClean="0"/>
-              <a:t>2025/10/9</a:t>
+              <a:t>2025/10/10</a:t>
             </a:fld>
             <a:endParaRPr kumimoji="1" lang="ja-JP" altLang="en-US"/>
           </a:p>
@@ -2639,7 +2646,7 @@
           <a:p>
             <a:fld id="{E9CC885B-4903-4D54-9A93-00025F12DED9}" type="datetimeFigureOut">
               <a:rPr kumimoji="1" lang="ja-JP" altLang="en-US" smtClean="0"/>
-              <a:t>2025/10/9</a:t>
+              <a:t>2025/10/10</a:t>
             </a:fld>
             <a:endParaRPr kumimoji="1" lang="ja-JP" altLang="en-US"/>
           </a:p>
@@ -2927,7 +2934,7 @@
           <a:p>
             <a:fld id="{E9CC885B-4903-4D54-9A93-00025F12DED9}" type="datetimeFigureOut">
               <a:rPr kumimoji="1" lang="ja-JP" altLang="en-US" smtClean="0"/>
-              <a:t>2025/10/9</a:t>
+              <a:t>2025/10/10</a:t>
             </a:fld>
             <a:endParaRPr kumimoji="1" lang="ja-JP" altLang="en-US"/>
           </a:p>
@@ -3200,7 +3207,7 @@
           <a:p>
             <a:fld id="{E9CC885B-4903-4D54-9A93-00025F12DED9}" type="datetimeFigureOut">
               <a:rPr kumimoji="1" lang="ja-JP" altLang="en-US" smtClean="0"/>
-              <a:t>2025/10/9</a:t>
+              <a:t>2025/10/10</a:t>
             </a:fld>
             <a:endParaRPr kumimoji="1" lang="ja-JP" altLang="en-US"/>
           </a:p>
@@ -3955,6 +3962,601 @@
     <p:extLst>
       <p:ext uri="{BB962C8B-B14F-4D97-AF65-F5344CB8AC3E}">
         <p14:creationId xmlns:p14="http://schemas.microsoft.com/office/powerpoint/2010/main" val="410028988"/>
+      </p:ext>
+    </p:extLst>
+  </p:cSld>
+  <p:clrMapOvr>
+    <a:masterClrMapping/>
+  </p:clrMapOvr>
+</p:sld>
+</file>
+
+<file path=ppt/slides/slide10.xml><?xml version="1.0" encoding="utf-8"?>
+<p:sld xmlns:a="http://schemas.openxmlformats.org/drawingml/2006/main" xmlns:r="http://schemas.openxmlformats.org/officeDocument/2006/relationships" xmlns:p="http://schemas.openxmlformats.org/presentationml/2006/main">
+  <p:cSld>
+    <p:spTree>
+      <p:nvGrpSpPr>
+        <p:cNvPr id="1" name=""/>
+        <p:cNvGrpSpPr/>
+        <p:nvPr/>
+      </p:nvGrpSpPr>
+      <p:grpSpPr>
+        <a:xfrm>
+          <a:off x="0" y="0"/>
+          <a:ext cx="0" cy="0"/>
+          <a:chOff x="0" y="0"/>
+          <a:chExt cx="0" cy="0"/>
+        </a:xfrm>
+      </p:grpSpPr>
+      <p:sp>
+        <p:nvSpPr>
+          <p:cNvPr id="4" name="テキスト ボックス 3">
+            <a:extLst>
+              <a:ext uri="{FF2B5EF4-FFF2-40B4-BE49-F238E27FC236}">
+                <a16:creationId xmlns:a16="http://schemas.microsoft.com/office/drawing/2014/main" id="{5A13BF46-B8C5-48AA-8308-C9ECFF431A18}"/>
+              </a:ext>
+            </a:extLst>
+          </p:cNvPr>
+          <p:cNvSpPr txBox="1"/>
+          <p:nvPr/>
+        </p:nvSpPr>
+        <p:spPr>
+          <a:xfrm>
+            <a:off x="567542" y="491954"/>
+            <a:ext cx="4774064" cy="584775"/>
+          </a:xfrm>
+          <a:prstGeom prst="rect">
+            <a:avLst/>
+          </a:prstGeom>
+          <a:noFill/>
+        </p:spPr>
+        <p:txBody>
+          <a:bodyPr wrap="none" rtlCol="0">
+            <a:spAutoFit/>
+          </a:bodyPr>
+          <a:lstStyle/>
+          <a:p>
+            <a:r>
+              <a:rPr kumimoji="1" lang="ja-JP" altLang="en-US" sz="3200" b="1" u="sng" dirty="0"/>
+              <a:t>チャットプログラム</a:t>
+            </a:r>
+            <a:r>
+              <a:rPr kumimoji="1" lang="en-US" altLang="ja-JP" sz="3200" b="1" u="sng" dirty="0"/>
+              <a:t>(CS)</a:t>
+            </a:r>
+            <a:endParaRPr kumimoji="1" lang="ja-JP" altLang="en-US" sz="3200" b="1" u="sng" dirty="0"/>
+          </a:p>
+        </p:txBody>
+      </p:sp>
+      <p:sp>
+        <p:nvSpPr>
+          <p:cNvPr id="6" name="テキスト ボックス 5">
+            <a:extLst>
+              <a:ext uri="{FF2B5EF4-FFF2-40B4-BE49-F238E27FC236}">
+                <a16:creationId xmlns:a16="http://schemas.microsoft.com/office/drawing/2014/main" id="{55830AD6-028B-4C4E-80BF-B70DFC1C3A46}"/>
+              </a:ext>
+            </a:extLst>
+          </p:cNvPr>
+          <p:cNvSpPr txBox="1"/>
+          <p:nvPr/>
+        </p:nvSpPr>
+        <p:spPr>
+          <a:xfrm>
+            <a:off x="567542" y="1216429"/>
+            <a:ext cx="9874819" cy="1200329"/>
+          </a:xfrm>
+          <a:prstGeom prst="rect">
+            <a:avLst/>
+          </a:prstGeom>
+          <a:noFill/>
+        </p:spPr>
+        <p:txBody>
+          <a:bodyPr wrap="none" rtlCol="0">
+            <a:spAutoFit/>
+          </a:bodyPr>
+          <a:lstStyle/>
+          <a:p>
+            <a:r>
+              <a:rPr lang="ja-JP" altLang="en-US" sz="2400" dirty="0"/>
+              <a:t>サーバーからのチャットデータを受信します。</a:t>
+            </a:r>
+            <a:endParaRPr lang="en-US" altLang="ja-JP" sz="2400" dirty="0"/>
+          </a:p>
+          <a:p>
+            <a:r>
+              <a:rPr kumimoji="1" lang="ja-JP" altLang="en-US" sz="2400" dirty="0"/>
+              <a:t>シリアライズされたデータなので</a:t>
+            </a:r>
+            <a:r>
+              <a:rPr kumimoji="1" lang="en-US" altLang="ja-JP" sz="2400" b="1" dirty="0">
+                <a:solidFill>
+                  <a:srgbClr val="00B050"/>
+                </a:solidFill>
+              </a:rPr>
+              <a:t>list</a:t>
+            </a:r>
+            <a:r>
+              <a:rPr kumimoji="1" lang="ja-JP" altLang="en-US" sz="2400" dirty="0"/>
+              <a:t>に戻してあげると良いでしょう。</a:t>
+            </a:r>
+            <a:endParaRPr kumimoji="1" lang="en-US" altLang="ja-JP" sz="2400" dirty="0"/>
+          </a:p>
+          <a:p>
+            <a:r>
+              <a:rPr lang="ja-JP" altLang="en-US" sz="2400" dirty="0"/>
+              <a:t>（</a:t>
+            </a:r>
+            <a:r>
+              <a:rPr lang="ja-JP" altLang="en-US" sz="2400" b="1" dirty="0">
+                <a:solidFill>
+                  <a:srgbClr val="FF0000"/>
+                </a:solidFill>
+              </a:rPr>
+              <a:t>デシリアライズ処理</a:t>
+            </a:r>
+            <a:r>
+              <a:rPr lang="ja-JP" altLang="en-US" sz="2400" dirty="0"/>
+              <a:t>）</a:t>
+            </a:r>
+            <a:endParaRPr kumimoji="1" lang="en-US" altLang="ja-JP" sz="2400" dirty="0"/>
+          </a:p>
+        </p:txBody>
+      </p:sp>
+      <p:pic>
+        <p:nvPicPr>
+          <p:cNvPr id="5" name="図 4">
+            <a:extLst>
+              <a:ext uri="{FF2B5EF4-FFF2-40B4-BE49-F238E27FC236}">
+                <a16:creationId xmlns:a16="http://schemas.microsoft.com/office/drawing/2014/main" id="{4E7EA95A-F357-45E2-97B5-9132EEB65341}"/>
+              </a:ext>
+            </a:extLst>
+          </p:cNvPr>
+          <p:cNvPicPr>
+            <a:picLocks noChangeAspect="1"/>
+          </p:cNvPicPr>
+          <p:nvPr/>
+        </p:nvPicPr>
+        <p:blipFill>
+          <a:blip r:embed="rId2"/>
+          <a:stretch>
+            <a:fillRect/>
+          </a:stretch>
+        </p:blipFill>
+        <p:spPr>
+          <a:xfrm>
+            <a:off x="567543" y="2556458"/>
+            <a:ext cx="6191846" cy="4067447"/>
+          </a:xfrm>
+          <a:prstGeom prst="rect">
+            <a:avLst/>
+          </a:prstGeom>
+        </p:spPr>
+      </p:pic>
+    </p:spTree>
+    <p:extLst>
+      <p:ext uri="{BB962C8B-B14F-4D97-AF65-F5344CB8AC3E}">
+        <p14:creationId xmlns:p14="http://schemas.microsoft.com/office/powerpoint/2010/main" val="98842802"/>
+      </p:ext>
+    </p:extLst>
+  </p:cSld>
+  <p:clrMapOvr>
+    <a:masterClrMapping/>
+  </p:clrMapOvr>
+</p:sld>
+</file>
+
+<file path=ppt/slides/slide11.xml><?xml version="1.0" encoding="utf-8"?>
+<p:sld xmlns:a="http://schemas.openxmlformats.org/drawingml/2006/main" xmlns:r="http://schemas.openxmlformats.org/officeDocument/2006/relationships" xmlns:p="http://schemas.openxmlformats.org/presentationml/2006/main">
+  <p:cSld>
+    <p:spTree>
+      <p:nvGrpSpPr>
+        <p:cNvPr id="1" name=""/>
+        <p:cNvGrpSpPr/>
+        <p:nvPr/>
+      </p:nvGrpSpPr>
+      <p:grpSpPr>
+        <a:xfrm>
+          <a:off x="0" y="0"/>
+          <a:ext cx="0" cy="0"/>
+          <a:chOff x="0" y="0"/>
+          <a:chExt cx="0" cy="0"/>
+        </a:xfrm>
+      </p:grpSpPr>
+      <p:sp>
+        <p:nvSpPr>
+          <p:cNvPr id="4" name="テキスト ボックス 3">
+            <a:extLst>
+              <a:ext uri="{FF2B5EF4-FFF2-40B4-BE49-F238E27FC236}">
+                <a16:creationId xmlns:a16="http://schemas.microsoft.com/office/drawing/2014/main" id="{5A13BF46-B8C5-48AA-8308-C9ECFF431A18}"/>
+              </a:ext>
+            </a:extLst>
+          </p:cNvPr>
+          <p:cNvSpPr txBox="1"/>
+          <p:nvPr/>
+        </p:nvSpPr>
+        <p:spPr>
+          <a:xfrm>
+            <a:off x="567542" y="491954"/>
+            <a:ext cx="4774064" cy="584775"/>
+          </a:xfrm>
+          <a:prstGeom prst="rect">
+            <a:avLst/>
+          </a:prstGeom>
+          <a:noFill/>
+        </p:spPr>
+        <p:txBody>
+          <a:bodyPr wrap="none" rtlCol="0">
+            <a:spAutoFit/>
+          </a:bodyPr>
+          <a:lstStyle/>
+          <a:p>
+            <a:r>
+              <a:rPr kumimoji="1" lang="ja-JP" altLang="en-US" sz="3200" b="1" u="sng" dirty="0"/>
+              <a:t>チャットプログラム</a:t>
+            </a:r>
+            <a:r>
+              <a:rPr kumimoji="1" lang="en-US" altLang="ja-JP" sz="3200" b="1" u="sng" dirty="0"/>
+              <a:t>(CS)</a:t>
+            </a:r>
+            <a:endParaRPr kumimoji="1" lang="ja-JP" altLang="en-US" sz="3200" b="1" u="sng" dirty="0"/>
+          </a:p>
+        </p:txBody>
+      </p:sp>
+      <p:sp>
+        <p:nvSpPr>
+          <p:cNvPr id="6" name="テキスト ボックス 5">
+            <a:extLst>
+              <a:ext uri="{FF2B5EF4-FFF2-40B4-BE49-F238E27FC236}">
+                <a16:creationId xmlns:a16="http://schemas.microsoft.com/office/drawing/2014/main" id="{55830AD6-028B-4C4E-80BF-B70DFC1C3A46}"/>
+              </a:ext>
+            </a:extLst>
+          </p:cNvPr>
+          <p:cNvSpPr txBox="1"/>
+          <p:nvPr/>
+        </p:nvSpPr>
+        <p:spPr>
+          <a:xfrm>
+            <a:off x="567542" y="1216429"/>
+            <a:ext cx="3262432" cy="461665"/>
+          </a:xfrm>
+          <a:prstGeom prst="rect">
+            <a:avLst/>
+          </a:prstGeom>
+          <a:noFill/>
+        </p:spPr>
+        <p:txBody>
+          <a:bodyPr wrap="none" rtlCol="0">
+            <a:spAutoFit/>
+          </a:bodyPr>
+          <a:lstStyle/>
+          <a:p>
+            <a:r>
+              <a:rPr lang="ja-JP" altLang="en-US" sz="2400" dirty="0"/>
+              <a:t>動作確認しましょう。</a:t>
+            </a:r>
+            <a:endParaRPr kumimoji="1" lang="en-US" altLang="ja-JP" sz="2400" dirty="0"/>
+          </a:p>
+        </p:txBody>
+      </p:sp>
+      <p:grpSp>
+        <p:nvGrpSpPr>
+          <p:cNvPr id="2" name="グループ化 1">
+            <a:extLst>
+              <a:ext uri="{FF2B5EF4-FFF2-40B4-BE49-F238E27FC236}">
+                <a16:creationId xmlns:a16="http://schemas.microsoft.com/office/drawing/2014/main" id="{3C3F09BC-AC9A-40AC-A5F2-B0F56043AA7C}"/>
+              </a:ext>
+            </a:extLst>
+          </p:cNvPr>
+          <p:cNvGrpSpPr/>
+          <p:nvPr/>
+        </p:nvGrpSpPr>
+        <p:grpSpPr>
+          <a:xfrm>
+            <a:off x="567542" y="1817794"/>
+            <a:ext cx="5528458" cy="3578959"/>
+            <a:chOff x="567542" y="1817794"/>
+            <a:chExt cx="7844644" cy="4853788"/>
+          </a:xfrm>
+        </p:grpSpPr>
+        <p:pic>
+          <p:nvPicPr>
+            <p:cNvPr id="7" name="図 6">
+              <a:extLst>
+                <a:ext uri="{FF2B5EF4-FFF2-40B4-BE49-F238E27FC236}">
+                  <a16:creationId xmlns:a16="http://schemas.microsoft.com/office/drawing/2014/main" id="{685031AD-2F9B-44DE-9EBB-34EBF522A2BC}"/>
+                </a:ext>
+              </a:extLst>
+            </p:cNvPr>
+            <p:cNvPicPr>
+              <a:picLocks noChangeAspect="1"/>
+            </p:cNvPicPr>
+            <p:nvPr/>
+          </p:nvPicPr>
+          <p:blipFill>
+            <a:blip r:embed="rId2"/>
+            <a:stretch>
+              <a:fillRect/>
+            </a:stretch>
+          </p:blipFill>
+          <p:spPr>
+            <a:xfrm>
+              <a:off x="567542" y="1817794"/>
+              <a:ext cx="1588245" cy="1351977"/>
+            </a:xfrm>
+            <a:prstGeom prst="rect">
+              <a:avLst/>
+            </a:prstGeom>
+          </p:spPr>
+        </p:pic>
+        <p:pic>
+          <p:nvPicPr>
+            <p:cNvPr id="8" name="図 7">
+              <a:extLst>
+                <a:ext uri="{FF2B5EF4-FFF2-40B4-BE49-F238E27FC236}">
+                  <a16:creationId xmlns:a16="http://schemas.microsoft.com/office/drawing/2014/main" id="{441F7EDF-8E99-4380-9432-9A411B3BE893}"/>
+                </a:ext>
+              </a:extLst>
+            </p:cNvPr>
+            <p:cNvPicPr>
+              <a:picLocks noChangeAspect="1"/>
+            </p:cNvPicPr>
+            <p:nvPr/>
+          </p:nvPicPr>
+          <p:blipFill>
+            <a:blip r:embed="rId2"/>
+            <a:stretch>
+              <a:fillRect/>
+            </a:stretch>
+          </p:blipFill>
+          <p:spPr>
+            <a:xfrm>
+              <a:off x="567542" y="3433276"/>
+              <a:ext cx="1588244" cy="1351976"/>
+            </a:xfrm>
+            <a:prstGeom prst="rect">
+              <a:avLst/>
+            </a:prstGeom>
+          </p:spPr>
+        </p:pic>
+        <p:pic>
+          <p:nvPicPr>
+            <p:cNvPr id="9" name="図 8">
+              <a:extLst>
+                <a:ext uri="{FF2B5EF4-FFF2-40B4-BE49-F238E27FC236}">
+                  <a16:creationId xmlns:a16="http://schemas.microsoft.com/office/drawing/2014/main" id="{43C9BEC0-8F1F-4645-9D94-3077ADEDC2ED}"/>
+                </a:ext>
+              </a:extLst>
+            </p:cNvPr>
+            <p:cNvPicPr>
+              <a:picLocks noChangeAspect="1"/>
+            </p:cNvPicPr>
+            <p:nvPr/>
+          </p:nvPicPr>
+          <p:blipFill>
+            <a:blip r:embed="rId2"/>
+            <a:stretch>
+              <a:fillRect/>
+            </a:stretch>
+          </p:blipFill>
+          <p:spPr>
+            <a:xfrm>
+              <a:off x="567542" y="5319606"/>
+              <a:ext cx="1588244" cy="1351976"/>
+            </a:xfrm>
+            <a:prstGeom prst="rect">
+              <a:avLst/>
+            </a:prstGeom>
+          </p:spPr>
+        </p:pic>
+        <p:pic>
+          <p:nvPicPr>
+            <p:cNvPr id="10" name="図 9">
+              <a:extLst>
+                <a:ext uri="{FF2B5EF4-FFF2-40B4-BE49-F238E27FC236}">
+                  <a16:creationId xmlns:a16="http://schemas.microsoft.com/office/drawing/2014/main" id="{5E6F1B19-952B-4912-BDC5-9C9CB1E59A3B}"/>
+                </a:ext>
+              </a:extLst>
+            </p:cNvPr>
+            <p:cNvPicPr>
+              <a:picLocks noChangeAspect="1"/>
+            </p:cNvPicPr>
+            <p:nvPr/>
+          </p:nvPicPr>
+          <p:blipFill>
+            <a:blip r:embed="rId3"/>
+            <a:stretch>
+              <a:fillRect/>
+            </a:stretch>
+          </p:blipFill>
+          <p:spPr>
+            <a:xfrm>
+              <a:off x="5411392" y="2647681"/>
+              <a:ext cx="3000794" cy="2505425"/>
+            </a:xfrm>
+            <a:prstGeom prst="rect">
+              <a:avLst/>
+            </a:prstGeom>
+          </p:spPr>
+        </p:pic>
+        <p:sp>
+          <p:nvSpPr>
+            <p:cNvPr id="11" name="矢印: 左右 10">
+              <a:extLst>
+                <a:ext uri="{FF2B5EF4-FFF2-40B4-BE49-F238E27FC236}">
+                  <a16:creationId xmlns:a16="http://schemas.microsoft.com/office/drawing/2014/main" id="{6C792525-F01A-419E-8960-67ADA8D49DC5}"/>
+                </a:ext>
+              </a:extLst>
+            </p:cNvPr>
+            <p:cNvSpPr/>
+            <p:nvPr/>
+          </p:nvSpPr>
+          <p:spPr>
+            <a:xfrm rot="1287548">
+              <a:off x="2590498" y="2370080"/>
+              <a:ext cx="2372777" cy="618565"/>
+            </a:xfrm>
+            <a:prstGeom prst="leftRightArrow">
+              <a:avLst/>
+            </a:prstGeom>
+          </p:spPr>
+          <p:style>
+            <a:lnRef idx="2">
+              <a:schemeClr val="accent1">
+                <a:shade val="50000"/>
+              </a:schemeClr>
+            </a:lnRef>
+            <a:fillRef idx="1">
+              <a:schemeClr val="accent1"/>
+            </a:fillRef>
+            <a:effectRef idx="0">
+              <a:schemeClr val="accent1"/>
+            </a:effectRef>
+            <a:fontRef idx="minor">
+              <a:schemeClr val="lt1"/>
+            </a:fontRef>
+          </p:style>
+          <p:txBody>
+            <a:bodyPr rtlCol="0" anchor="ctr"/>
+            <a:lstStyle/>
+            <a:p>
+              <a:pPr algn="ctr"/>
+              <a:endParaRPr kumimoji="1" lang="ja-JP" altLang="en-US"/>
+            </a:p>
+          </p:txBody>
+        </p:sp>
+        <p:sp>
+          <p:nvSpPr>
+            <p:cNvPr id="12" name="矢印: 左右 11">
+              <a:extLst>
+                <a:ext uri="{FF2B5EF4-FFF2-40B4-BE49-F238E27FC236}">
+                  <a16:creationId xmlns:a16="http://schemas.microsoft.com/office/drawing/2014/main" id="{117C53ED-34A8-4F62-9F2D-01910558D293}"/>
+                </a:ext>
+              </a:extLst>
+            </p:cNvPr>
+            <p:cNvSpPr/>
+            <p:nvPr/>
+          </p:nvSpPr>
+          <p:spPr>
+            <a:xfrm>
+              <a:off x="2559592" y="3799981"/>
+              <a:ext cx="2372777" cy="618565"/>
+            </a:xfrm>
+            <a:prstGeom prst="leftRightArrow">
+              <a:avLst/>
+            </a:prstGeom>
+          </p:spPr>
+          <p:style>
+            <a:lnRef idx="2">
+              <a:schemeClr val="accent1">
+                <a:shade val="50000"/>
+              </a:schemeClr>
+            </a:lnRef>
+            <a:fillRef idx="1">
+              <a:schemeClr val="accent1"/>
+            </a:fillRef>
+            <a:effectRef idx="0">
+              <a:schemeClr val="accent1"/>
+            </a:effectRef>
+            <a:fontRef idx="minor">
+              <a:schemeClr val="lt1"/>
+            </a:fontRef>
+          </p:style>
+          <p:txBody>
+            <a:bodyPr rtlCol="0" anchor="ctr"/>
+            <a:lstStyle/>
+            <a:p>
+              <a:pPr algn="ctr"/>
+              <a:endParaRPr kumimoji="1" lang="ja-JP" altLang="en-US"/>
+            </a:p>
+          </p:txBody>
+        </p:sp>
+        <p:sp>
+          <p:nvSpPr>
+            <p:cNvPr id="13" name="矢印: 左右 12">
+              <a:extLst>
+                <a:ext uri="{FF2B5EF4-FFF2-40B4-BE49-F238E27FC236}">
+                  <a16:creationId xmlns:a16="http://schemas.microsoft.com/office/drawing/2014/main" id="{B4A31062-3FCC-4603-941F-932883968BE6}"/>
+                </a:ext>
+              </a:extLst>
+            </p:cNvPr>
+            <p:cNvSpPr/>
+            <p:nvPr/>
+          </p:nvSpPr>
+          <p:spPr>
+            <a:xfrm rot="19784611">
+              <a:off x="2553819" y="5331524"/>
+              <a:ext cx="2372777" cy="618565"/>
+            </a:xfrm>
+            <a:prstGeom prst="leftRightArrow">
+              <a:avLst/>
+            </a:prstGeom>
+          </p:spPr>
+          <p:style>
+            <a:lnRef idx="2">
+              <a:schemeClr val="accent1">
+                <a:shade val="50000"/>
+              </a:schemeClr>
+            </a:lnRef>
+            <a:fillRef idx="1">
+              <a:schemeClr val="accent1"/>
+            </a:fillRef>
+            <a:effectRef idx="0">
+              <a:schemeClr val="accent1"/>
+            </a:effectRef>
+            <a:fontRef idx="minor">
+              <a:schemeClr val="lt1"/>
+            </a:fontRef>
+          </p:style>
+          <p:txBody>
+            <a:bodyPr rtlCol="0" anchor="ctr"/>
+            <a:lstStyle/>
+            <a:p>
+              <a:pPr algn="ctr"/>
+              <a:endParaRPr kumimoji="1" lang="ja-JP" altLang="en-US"/>
+            </a:p>
+          </p:txBody>
+        </p:sp>
+      </p:grpSp>
+      <p:sp>
+        <p:nvSpPr>
+          <p:cNvPr id="14" name="テキスト ボックス 13">
+            <a:extLst>
+              <a:ext uri="{FF2B5EF4-FFF2-40B4-BE49-F238E27FC236}">
+                <a16:creationId xmlns:a16="http://schemas.microsoft.com/office/drawing/2014/main" id="{71BA7F07-B745-4E89-837E-B872C7B10A11}"/>
+              </a:ext>
+            </a:extLst>
+          </p:cNvPr>
+          <p:cNvSpPr txBox="1"/>
+          <p:nvPr/>
+        </p:nvSpPr>
+        <p:spPr>
+          <a:xfrm>
+            <a:off x="567542" y="5648986"/>
+            <a:ext cx="7263527" cy="461665"/>
+          </a:xfrm>
+          <a:prstGeom prst="rect">
+            <a:avLst/>
+          </a:prstGeom>
+          <a:noFill/>
+        </p:spPr>
+        <p:txBody>
+          <a:bodyPr wrap="none" rtlCol="0">
+            <a:spAutoFit/>
+          </a:bodyPr>
+          <a:lstStyle/>
+          <a:p>
+            <a:r>
+              <a:rPr lang="ja-JP" altLang="en-US" sz="2400" dirty="0"/>
+              <a:t>別席の人のサーバーに繋いだりもしてみましょう。</a:t>
+            </a:r>
+            <a:endParaRPr kumimoji="1" lang="en-US" altLang="ja-JP" sz="2400" dirty="0"/>
+          </a:p>
+        </p:txBody>
+      </p:sp>
+    </p:spTree>
+    <p:extLst>
+      <p:ext uri="{BB962C8B-B14F-4D97-AF65-F5344CB8AC3E}">
+        <p14:creationId xmlns:p14="http://schemas.microsoft.com/office/powerpoint/2010/main" val="4030790080"/>
       </p:ext>
     </p:extLst>
   </p:cSld>
@@ -4872,7 +5474,19 @@
           <a:p>
             <a:r>
               <a:rPr lang="ja-JP" altLang="en-US" sz="2400" dirty="0"/>
-              <a:t>つまり、チャットの全メッセージを全クライアントに送ることになります。</a:t>
+              <a:t>つまり、</a:t>
+            </a:r>
+            <a:r>
+              <a:rPr lang="ja-JP" altLang="en-US" sz="2400" b="1" dirty="0">
+                <a:solidFill>
+                  <a:srgbClr val="FF0000"/>
+                </a:solidFill>
+              </a:rPr>
+              <a:t>チャットの全メッセージを全クライアントに送る</a:t>
+            </a:r>
+            <a:r>
+              <a:rPr lang="ja-JP" altLang="en-US" sz="2400" dirty="0"/>
+              <a:t>ことになります。</a:t>
             </a:r>
             <a:endParaRPr lang="en-US" altLang="ja-JP" sz="2400" dirty="0"/>
           </a:p>
@@ -4946,42 +5560,6 @@
             <a:r>
               <a:rPr lang="ja-JP" altLang="en-US" sz="2400" dirty="0"/>
               <a:t>この内容を全クライアントへ</a:t>
-            </a:r>
-            <a:endParaRPr lang="en-US" altLang="ja-JP" sz="2400" dirty="0"/>
-          </a:p>
-        </p:txBody>
-      </p:sp>
-      <p:sp>
-        <p:nvSpPr>
-          <p:cNvPr id="31" name="テキスト ボックス 30">
-            <a:extLst>
-              <a:ext uri="{FF2B5EF4-FFF2-40B4-BE49-F238E27FC236}">
-                <a16:creationId xmlns:a16="http://schemas.microsoft.com/office/drawing/2014/main" id="{8A95FF85-AF5C-4713-91BE-1A0C958EE87F}"/>
-              </a:ext>
-            </a:extLst>
-          </p:cNvPr>
-          <p:cNvSpPr txBox="1"/>
-          <p:nvPr/>
-        </p:nvSpPr>
-        <p:spPr>
-          <a:xfrm>
-            <a:off x="567542" y="5641571"/>
-            <a:ext cx="5416868" cy="461665"/>
-          </a:xfrm>
-          <a:prstGeom prst="rect">
-            <a:avLst/>
-          </a:prstGeom>
-          <a:noFill/>
-        </p:spPr>
-        <p:txBody>
-          <a:bodyPr wrap="none" rtlCol="0">
-            <a:spAutoFit/>
-          </a:bodyPr>
-          <a:lstStyle/>
-          <a:p>
-            <a:r>
-              <a:rPr lang="ja-JP" altLang="en-US" sz="2400"/>
-              <a:t>以上を踏まえて練習してみましょう。</a:t>
             </a:r>
             <a:endParaRPr lang="en-US" altLang="ja-JP" sz="2400" dirty="0"/>
           </a:p>
@@ -5032,6 +5610,149 @@
         <p:spPr>
           <a:xfrm>
             <a:off x="567542" y="491954"/>
+            <a:ext cx="5711820" cy="584775"/>
+          </a:xfrm>
+          <a:prstGeom prst="rect">
+            <a:avLst/>
+          </a:prstGeom>
+          <a:noFill/>
+        </p:spPr>
+        <p:txBody>
+          <a:bodyPr wrap="none" rtlCol="0">
+            <a:spAutoFit/>
+          </a:bodyPr>
+          <a:lstStyle/>
+          <a:p>
+            <a:r>
+              <a:rPr kumimoji="1" lang="ja-JP" altLang="en-US" sz="3200" b="1" u="sng" dirty="0"/>
+              <a:t>チャットプログラム</a:t>
+            </a:r>
+            <a:r>
+              <a:rPr kumimoji="1" lang="en-US" altLang="ja-JP" sz="3200" b="1" u="sng" dirty="0"/>
+              <a:t>(CS) </a:t>
+            </a:r>
+            <a:r>
+              <a:rPr kumimoji="1" lang="ja-JP" altLang="en-US" sz="3200" b="1" u="sng" dirty="0"/>
+              <a:t>復習</a:t>
+            </a:r>
+          </a:p>
+        </p:txBody>
+      </p:sp>
+      <p:sp>
+        <p:nvSpPr>
+          <p:cNvPr id="6" name="テキスト ボックス 5">
+            <a:extLst>
+              <a:ext uri="{FF2B5EF4-FFF2-40B4-BE49-F238E27FC236}">
+                <a16:creationId xmlns:a16="http://schemas.microsoft.com/office/drawing/2014/main" id="{55830AD6-028B-4C4E-80BF-B70DFC1C3A46}"/>
+              </a:ext>
+            </a:extLst>
+          </p:cNvPr>
+          <p:cNvSpPr txBox="1"/>
+          <p:nvPr/>
+        </p:nvSpPr>
+        <p:spPr>
+          <a:xfrm>
+            <a:off x="567542" y="1216429"/>
+            <a:ext cx="8494633" cy="2677656"/>
+          </a:xfrm>
+          <a:prstGeom prst="rect">
+            <a:avLst/>
+          </a:prstGeom>
+          <a:noFill/>
+        </p:spPr>
+        <p:txBody>
+          <a:bodyPr wrap="none" rtlCol="0">
+            <a:spAutoFit/>
+          </a:bodyPr>
+          <a:lstStyle/>
+          <a:p>
+            <a:r>
+              <a:rPr lang="ja-JP" altLang="en-US" sz="2400" dirty="0"/>
+              <a:t>つまり、サーバーの仕事は以下になります。</a:t>
+            </a:r>
+            <a:endParaRPr lang="en-US" altLang="ja-JP" sz="2400" dirty="0"/>
+          </a:p>
+          <a:p>
+            <a:endParaRPr lang="en-US" altLang="ja-JP" sz="2400" dirty="0"/>
+          </a:p>
+          <a:p>
+            <a:r>
+              <a:rPr lang="ja-JP" altLang="en-US" sz="2400" dirty="0"/>
+              <a:t>１．クライアントからメッセージを受信する</a:t>
+            </a:r>
+            <a:endParaRPr lang="en-US" altLang="ja-JP" sz="2400" dirty="0"/>
+          </a:p>
+          <a:p>
+            <a:r>
+              <a:rPr lang="ja-JP" altLang="en-US" sz="2400" dirty="0"/>
+              <a:t>２．受信したメッセージを記録する</a:t>
+            </a:r>
+            <a:endParaRPr lang="en-US" altLang="ja-JP" sz="2400" dirty="0"/>
+          </a:p>
+          <a:p>
+            <a:r>
+              <a:rPr lang="ja-JP" altLang="en-US" sz="2400" dirty="0"/>
+              <a:t>３．チャット内容が変わったら全員に最新の状態を送信する</a:t>
+            </a:r>
+            <a:endParaRPr lang="en-US" altLang="ja-JP" sz="2400" dirty="0"/>
+          </a:p>
+          <a:p>
+            <a:endParaRPr lang="en-US" altLang="ja-JP" sz="2400" dirty="0"/>
+          </a:p>
+          <a:p>
+            <a:r>
+              <a:rPr lang="ja-JP" altLang="en-US" sz="2400" dirty="0"/>
+              <a:t>以上を踏まえて練習しましょう。</a:t>
+            </a:r>
+            <a:endParaRPr lang="en-US" altLang="ja-JP" sz="2400" dirty="0"/>
+          </a:p>
+        </p:txBody>
+      </p:sp>
+    </p:spTree>
+    <p:extLst>
+      <p:ext uri="{BB962C8B-B14F-4D97-AF65-F5344CB8AC3E}">
+        <p14:creationId xmlns:p14="http://schemas.microsoft.com/office/powerpoint/2010/main" val="2270024806"/>
+      </p:ext>
+    </p:extLst>
+  </p:cSld>
+  <p:clrMapOvr>
+    <a:masterClrMapping/>
+  </p:clrMapOvr>
+</p:sld>
+</file>
+
+<file path=ppt/slides/slide5.xml><?xml version="1.0" encoding="utf-8"?>
+<p:sld xmlns:a="http://schemas.openxmlformats.org/drawingml/2006/main" xmlns:r="http://schemas.openxmlformats.org/officeDocument/2006/relationships" xmlns:p="http://schemas.openxmlformats.org/presentationml/2006/main">
+  <p:cSld>
+    <p:spTree>
+      <p:nvGrpSpPr>
+        <p:cNvPr id="1" name=""/>
+        <p:cNvGrpSpPr/>
+        <p:nvPr/>
+      </p:nvGrpSpPr>
+      <p:grpSpPr>
+        <a:xfrm>
+          <a:off x="0" y="0"/>
+          <a:ext cx="0" cy="0"/>
+          <a:chOff x="0" y="0"/>
+          <a:chExt cx="0" cy="0"/>
+        </a:xfrm>
+      </p:grpSpPr>
+      <p:sp>
+        <p:nvSpPr>
+          <p:cNvPr id="4" name="テキスト ボックス 3">
+            <a:extLst>
+              <a:ext uri="{FF2B5EF4-FFF2-40B4-BE49-F238E27FC236}">
+                <a16:creationId xmlns:a16="http://schemas.microsoft.com/office/drawing/2014/main" id="{5A13BF46-B8C5-48AA-8308-C9ECFF431A18}"/>
+              </a:ext>
+            </a:extLst>
+          </p:cNvPr>
+          <p:cNvSpPr txBox="1"/>
+          <p:nvPr/>
+        </p:nvSpPr>
+        <p:spPr>
+          <a:xfrm>
+            <a:off x="567542" y="491954"/>
             <a:ext cx="4774064" cy="584775"/>
           </a:xfrm>
           <a:prstGeom prst="rect">
@@ -5143,6 +5864,709 @@
     <p:extLst>
       <p:ext uri="{BB962C8B-B14F-4D97-AF65-F5344CB8AC3E}">
         <p14:creationId xmlns:p14="http://schemas.microsoft.com/office/powerpoint/2010/main" val="4272898341"/>
+      </p:ext>
+    </p:extLst>
+  </p:cSld>
+  <p:clrMapOvr>
+    <a:masterClrMapping/>
+  </p:clrMapOvr>
+</p:sld>
+</file>
+
+<file path=ppt/slides/slide6.xml><?xml version="1.0" encoding="utf-8"?>
+<p:sld xmlns:a="http://schemas.openxmlformats.org/drawingml/2006/main" xmlns:r="http://schemas.openxmlformats.org/officeDocument/2006/relationships" xmlns:p="http://schemas.openxmlformats.org/presentationml/2006/main">
+  <p:cSld>
+    <p:spTree>
+      <p:nvGrpSpPr>
+        <p:cNvPr id="1" name=""/>
+        <p:cNvGrpSpPr/>
+        <p:nvPr/>
+      </p:nvGrpSpPr>
+      <p:grpSpPr>
+        <a:xfrm>
+          <a:off x="0" y="0"/>
+          <a:ext cx="0" cy="0"/>
+          <a:chOff x="0" y="0"/>
+          <a:chExt cx="0" cy="0"/>
+        </a:xfrm>
+      </p:grpSpPr>
+      <p:sp>
+        <p:nvSpPr>
+          <p:cNvPr id="4" name="テキスト ボックス 3">
+            <a:extLst>
+              <a:ext uri="{FF2B5EF4-FFF2-40B4-BE49-F238E27FC236}">
+                <a16:creationId xmlns:a16="http://schemas.microsoft.com/office/drawing/2014/main" id="{5A13BF46-B8C5-48AA-8308-C9ECFF431A18}"/>
+              </a:ext>
+            </a:extLst>
+          </p:cNvPr>
+          <p:cNvSpPr txBox="1"/>
+          <p:nvPr/>
+        </p:nvSpPr>
+        <p:spPr>
+          <a:xfrm>
+            <a:off x="567542" y="491954"/>
+            <a:ext cx="4774064" cy="584775"/>
+          </a:xfrm>
+          <a:prstGeom prst="rect">
+            <a:avLst/>
+          </a:prstGeom>
+          <a:noFill/>
+        </p:spPr>
+        <p:txBody>
+          <a:bodyPr wrap="none" rtlCol="0">
+            <a:spAutoFit/>
+          </a:bodyPr>
+          <a:lstStyle/>
+          <a:p>
+            <a:r>
+              <a:rPr kumimoji="1" lang="ja-JP" altLang="en-US" sz="3200" b="1" u="sng" dirty="0"/>
+              <a:t>チャットプログラム</a:t>
+            </a:r>
+            <a:r>
+              <a:rPr kumimoji="1" lang="en-US" altLang="ja-JP" sz="3200" b="1" u="sng" dirty="0"/>
+              <a:t>(CS)</a:t>
+            </a:r>
+            <a:endParaRPr kumimoji="1" lang="ja-JP" altLang="en-US" sz="3200" b="1" u="sng" dirty="0"/>
+          </a:p>
+        </p:txBody>
+      </p:sp>
+      <p:sp>
+        <p:nvSpPr>
+          <p:cNvPr id="6" name="テキスト ボックス 5">
+            <a:extLst>
+              <a:ext uri="{FF2B5EF4-FFF2-40B4-BE49-F238E27FC236}">
+                <a16:creationId xmlns:a16="http://schemas.microsoft.com/office/drawing/2014/main" id="{55830AD6-028B-4C4E-80BF-B70DFC1C3A46}"/>
+              </a:ext>
+            </a:extLst>
+          </p:cNvPr>
+          <p:cNvSpPr txBox="1"/>
+          <p:nvPr/>
+        </p:nvSpPr>
+        <p:spPr>
+          <a:xfrm>
+            <a:off x="567542" y="1216429"/>
+            <a:ext cx="9837950" cy="1200329"/>
+          </a:xfrm>
+          <a:prstGeom prst="rect">
+            <a:avLst/>
+          </a:prstGeom>
+          <a:noFill/>
+        </p:spPr>
+        <p:txBody>
+          <a:bodyPr wrap="none" rtlCol="0">
+            <a:spAutoFit/>
+          </a:bodyPr>
+          <a:lstStyle/>
+          <a:p>
+            <a:r>
+              <a:rPr kumimoji="1" lang="ja-JP" altLang="en-US" sz="2400" dirty="0"/>
+              <a:t>受信処理</a:t>
+            </a:r>
+            <a:r>
+              <a:rPr kumimoji="1" lang="en-US" altLang="ja-JP" sz="2400" b="1" dirty="0" err="1">
+                <a:solidFill>
+                  <a:srgbClr val="0070C0"/>
+                </a:solidFill>
+              </a:rPr>
+              <a:t>ReceiveData</a:t>
+            </a:r>
+            <a:r>
+              <a:rPr kumimoji="1" lang="ja-JP" altLang="en-US" sz="2400" b="1" dirty="0">
+                <a:solidFill>
+                  <a:srgbClr val="0070C0"/>
+                </a:solidFill>
+              </a:rPr>
+              <a:t>関数</a:t>
+            </a:r>
+            <a:r>
+              <a:rPr lang="ja-JP" altLang="en-US" sz="2400" b="1" dirty="0">
+                <a:solidFill>
+                  <a:srgbClr val="FF0000"/>
+                </a:solidFill>
+              </a:rPr>
+              <a:t>（</a:t>
+            </a:r>
+            <a:r>
+              <a:rPr lang="en-US" altLang="ja-JP" sz="2400" b="1" dirty="0">
+                <a:solidFill>
+                  <a:srgbClr val="FF0000"/>
+                </a:solidFill>
+              </a:rPr>
+              <a:t>Server.cpp</a:t>
+            </a:r>
+            <a:r>
+              <a:rPr lang="ja-JP" altLang="en-US" sz="2400" b="1" dirty="0">
+                <a:solidFill>
+                  <a:srgbClr val="FF0000"/>
+                </a:solidFill>
+              </a:rPr>
+              <a:t>）</a:t>
+            </a:r>
+            <a:r>
+              <a:rPr lang="ja-JP" altLang="en-US" sz="2400" dirty="0"/>
+              <a:t>は以前練習した通りです。</a:t>
+            </a:r>
+            <a:endParaRPr lang="en-US" altLang="ja-JP" sz="2400" dirty="0"/>
+          </a:p>
+          <a:p>
+            <a:r>
+              <a:rPr kumimoji="1" lang="ja-JP" altLang="en-US" sz="2400" dirty="0"/>
+              <a:t>今回は</a:t>
+            </a:r>
+            <a:r>
+              <a:rPr kumimoji="1" lang="ja-JP" altLang="en-US" sz="2400" b="1" dirty="0">
+                <a:solidFill>
+                  <a:srgbClr val="FF0000"/>
+                </a:solidFill>
+              </a:rPr>
+              <a:t>受信＝チャット更新</a:t>
+            </a:r>
+            <a:r>
+              <a:rPr kumimoji="1" lang="ja-JP" altLang="en-US" sz="2400" dirty="0"/>
+              <a:t>となるので、</a:t>
+            </a:r>
+            <a:endParaRPr kumimoji="1" lang="en-US" altLang="ja-JP" sz="2400" dirty="0"/>
+          </a:p>
+          <a:p>
+            <a:r>
+              <a:rPr lang="ja-JP" altLang="en-US" sz="2400" dirty="0"/>
+              <a:t>受信後に全員にチャット内容を送信します。</a:t>
+            </a:r>
+            <a:endParaRPr kumimoji="1" lang="en-US" altLang="ja-JP" sz="2400" dirty="0"/>
+          </a:p>
+        </p:txBody>
+      </p:sp>
+      <p:pic>
+        <p:nvPicPr>
+          <p:cNvPr id="3" name="図 2">
+            <a:extLst>
+              <a:ext uri="{FF2B5EF4-FFF2-40B4-BE49-F238E27FC236}">
+                <a16:creationId xmlns:a16="http://schemas.microsoft.com/office/drawing/2014/main" id="{BDC686C6-FFB0-4D9D-A118-D9C25A6770E6}"/>
+              </a:ext>
+            </a:extLst>
+          </p:cNvPr>
+          <p:cNvPicPr>
+            <a:picLocks noChangeAspect="1"/>
+          </p:cNvPicPr>
+          <p:nvPr/>
+        </p:nvPicPr>
+        <p:blipFill>
+          <a:blip r:embed="rId2"/>
+          <a:stretch>
+            <a:fillRect/>
+          </a:stretch>
+        </p:blipFill>
+        <p:spPr>
+          <a:xfrm>
+            <a:off x="567542" y="2564019"/>
+            <a:ext cx="4774064" cy="3943001"/>
+          </a:xfrm>
+          <a:prstGeom prst="rect">
+            <a:avLst/>
+          </a:prstGeom>
+        </p:spPr>
+      </p:pic>
+    </p:spTree>
+    <p:extLst>
+      <p:ext uri="{BB962C8B-B14F-4D97-AF65-F5344CB8AC3E}">
+        <p14:creationId xmlns:p14="http://schemas.microsoft.com/office/powerpoint/2010/main" val="49718387"/>
+      </p:ext>
+    </p:extLst>
+  </p:cSld>
+  <p:clrMapOvr>
+    <a:masterClrMapping/>
+  </p:clrMapOvr>
+</p:sld>
+</file>
+
+<file path=ppt/slides/slide7.xml><?xml version="1.0" encoding="utf-8"?>
+<p:sld xmlns:a="http://schemas.openxmlformats.org/drawingml/2006/main" xmlns:r="http://schemas.openxmlformats.org/officeDocument/2006/relationships" xmlns:p="http://schemas.openxmlformats.org/presentationml/2006/main">
+  <p:cSld>
+    <p:spTree>
+      <p:nvGrpSpPr>
+        <p:cNvPr id="1" name=""/>
+        <p:cNvGrpSpPr/>
+        <p:nvPr/>
+      </p:nvGrpSpPr>
+      <p:grpSpPr>
+        <a:xfrm>
+          <a:off x="0" y="0"/>
+          <a:ext cx="0" cy="0"/>
+          <a:chOff x="0" y="0"/>
+          <a:chExt cx="0" cy="0"/>
+        </a:xfrm>
+      </p:grpSpPr>
+      <p:sp>
+        <p:nvSpPr>
+          <p:cNvPr id="4" name="テキスト ボックス 3">
+            <a:extLst>
+              <a:ext uri="{FF2B5EF4-FFF2-40B4-BE49-F238E27FC236}">
+                <a16:creationId xmlns:a16="http://schemas.microsoft.com/office/drawing/2014/main" id="{5A13BF46-B8C5-48AA-8308-C9ECFF431A18}"/>
+              </a:ext>
+            </a:extLst>
+          </p:cNvPr>
+          <p:cNvSpPr txBox="1"/>
+          <p:nvPr/>
+        </p:nvSpPr>
+        <p:spPr>
+          <a:xfrm>
+            <a:off x="567542" y="491954"/>
+            <a:ext cx="4774064" cy="584775"/>
+          </a:xfrm>
+          <a:prstGeom prst="rect">
+            <a:avLst/>
+          </a:prstGeom>
+          <a:noFill/>
+        </p:spPr>
+        <p:txBody>
+          <a:bodyPr wrap="none" rtlCol="0">
+            <a:spAutoFit/>
+          </a:bodyPr>
+          <a:lstStyle/>
+          <a:p>
+            <a:r>
+              <a:rPr kumimoji="1" lang="ja-JP" altLang="en-US" sz="3200" b="1" u="sng" dirty="0"/>
+              <a:t>チャットプログラム</a:t>
+            </a:r>
+            <a:r>
+              <a:rPr kumimoji="1" lang="en-US" altLang="ja-JP" sz="3200" b="1" u="sng" dirty="0"/>
+              <a:t>(CS)</a:t>
+            </a:r>
+            <a:endParaRPr kumimoji="1" lang="ja-JP" altLang="en-US" sz="3200" b="1" u="sng" dirty="0"/>
+          </a:p>
+        </p:txBody>
+      </p:sp>
+      <p:sp>
+        <p:nvSpPr>
+          <p:cNvPr id="6" name="テキスト ボックス 5">
+            <a:extLst>
+              <a:ext uri="{FF2B5EF4-FFF2-40B4-BE49-F238E27FC236}">
+                <a16:creationId xmlns:a16="http://schemas.microsoft.com/office/drawing/2014/main" id="{55830AD6-028B-4C4E-80BF-B70DFC1C3A46}"/>
+              </a:ext>
+            </a:extLst>
+          </p:cNvPr>
+          <p:cNvSpPr txBox="1"/>
+          <p:nvPr/>
+        </p:nvSpPr>
+        <p:spPr>
+          <a:xfrm>
+            <a:off x="567542" y="1216429"/>
+            <a:ext cx="7263527" cy="461665"/>
+          </a:xfrm>
+          <a:prstGeom prst="rect">
+            <a:avLst/>
+          </a:prstGeom>
+          <a:noFill/>
+        </p:spPr>
+        <p:txBody>
+          <a:bodyPr wrap="none" rtlCol="0">
+            <a:spAutoFit/>
+          </a:bodyPr>
+          <a:lstStyle/>
+          <a:p>
+            <a:r>
+              <a:rPr kumimoji="1" lang="ja-JP" altLang="en-US" sz="2400" dirty="0"/>
+              <a:t>あとは全クライアントに送信する処理を作ります。</a:t>
+            </a:r>
+            <a:endParaRPr kumimoji="1" lang="en-US" altLang="ja-JP" sz="2400" dirty="0"/>
+          </a:p>
+        </p:txBody>
+      </p:sp>
+      <p:pic>
+        <p:nvPicPr>
+          <p:cNvPr id="5" name="図 4">
+            <a:extLst>
+              <a:ext uri="{FF2B5EF4-FFF2-40B4-BE49-F238E27FC236}">
+                <a16:creationId xmlns:a16="http://schemas.microsoft.com/office/drawing/2014/main" id="{C5816F28-A053-4432-A501-50D6BE26ADFC}"/>
+              </a:ext>
+            </a:extLst>
+          </p:cNvPr>
+          <p:cNvPicPr>
+            <a:picLocks noChangeAspect="1"/>
+          </p:cNvPicPr>
+          <p:nvPr/>
+        </p:nvPicPr>
+        <p:blipFill>
+          <a:blip r:embed="rId2"/>
+          <a:stretch>
+            <a:fillRect/>
+          </a:stretch>
+        </p:blipFill>
+        <p:spPr>
+          <a:xfrm>
+            <a:off x="567542" y="1817794"/>
+            <a:ext cx="8859486" cy="4229690"/>
+          </a:xfrm>
+          <a:prstGeom prst="rect">
+            <a:avLst/>
+          </a:prstGeom>
+        </p:spPr>
+      </p:pic>
+    </p:spTree>
+    <p:extLst>
+      <p:ext uri="{BB962C8B-B14F-4D97-AF65-F5344CB8AC3E}">
+        <p14:creationId xmlns:p14="http://schemas.microsoft.com/office/powerpoint/2010/main" val="780854524"/>
+      </p:ext>
+    </p:extLst>
+  </p:cSld>
+  <p:clrMapOvr>
+    <a:masterClrMapping/>
+  </p:clrMapOvr>
+</p:sld>
+</file>
+
+<file path=ppt/slides/slide8.xml><?xml version="1.0" encoding="utf-8"?>
+<p:sld xmlns:a="http://schemas.openxmlformats.org/drawingml/2006/main" xmlns:r="http://schemas.openxmlformats.org/officeDocument/2006/relationships" xmlns:p="http://schemas.openxmlformats.org/presentationml/2006/main">
+  <p:cSld>
+    <p:spTree>
+      <p:nvGrpSpPr>
+        <p:cNvPr id="1" name=""/>
+        <p:cNvGrpSpPr/>
+        <p:nvPr/>
+      </p:nvGrpSpPr>
+      <p:grpSpPr>
+        <a:xfrm>
+          <a:off x="0" y="0"/>
+          <a:ext cx="0" cy="0"/>
+          <a:chOff x="0" y="0"/>
+          <a:chExt cx="0" cy="0"/>
+        </a:xfrm>
+      </p:grpSpPr>
+      <p:sp>
+        <p:nvSpPr>
+          <p:cNvPr id="4" name="テキスト ボックス 3">
+            <a:extLst>
+              <a:ext uri="{FF2B5EF4-FFF2-40B4-BE49-F238E27FC236}">
+                <a16:creationId xmlns:a16="http://schemas.microsoft.com/office/drawing/2014/main" id="{5A13BF46-B8C5-48AA-8308-C9ECFF431A18}"/>
+              </a:ext>
+            </a:extLst>
+          </p:cNvPr>
+          <p:cNvSpPr txBox="1"/>
+          <p:nvPr/>
+        </p:nvSpPr>
+        <p:spPr>
+          <a:xfrm>
+            <a:off x="567542" y="491954"/>
+            <a:ext cx="4774064" cy="584775"/>
+          </a:xfrm>
+          <a:prstGeom prst="rect">
+            <a:avLst/>
+          </a:prstGeom>
+          <a:noFill/>
+        </p:spPr>
+        <p:txBody>
+          <a:bodyPr wrap="none" rtlCol="0">
+            <a:spAutoFit/>
+          </a:bodyPr>
+          <a:lstStyle/>
+          <a:p>
+            <a:r>
+              <a:rPr kumimoji="1" lang="ja-JP" altLang="en-US" sz="3200" b="1" u="sng" dirty="0"/>
+              <a:t>チャットプログラム</a:t>
+            </a:r>
+            <a:r>
+              <a:rPr kumimoji="1" lang="en-US" altLang="ja-JP" sz="3200" b="1" u="sng" dirty="0"/>
+              <a:t>(CS)</a:t>
+            </a:r>
+            <a:endParaRPr kumimoji="1" lang="ja-JP" altLang="en-US" sz="3200" b="1" u="sng" dirty="0"/>
+          </a:p>
+        </p:txBody>
+      </p:sp>
+      <p:sp>
+        <p:nvSpPr>
+          <p:cNvPr id="6" name="テキスト ボックス 5">
+            <a:extLst>
+              <a:ext uri="{FF2B5EF4-FFF2-40B4-BE49-F238E27FC236}">
+                <a16:creationId xmlns:a16="http://schemas.microsoft.com/office/drawing/2014/main" id="{55830AD6-028B-4C4E-80BF-B70DFC1C3A46}"/>
+              </a:ext>
+            </a:extLst>
+          </p:cNvPr>
+          <p:cNvSpPr txBox="1"/>
+          <p:nvPr/>
+        </p:nvSpPr>
+        <p:spPr>
+          <a:xfrm>
+            <a:off x="567542" y="1216429"/>
+            <a:ext cx="10649069" cy="1569660"/>
+          </a:xfrm>
+          <a:prstGeom prst="rect">
+            <a:avLst/>
+          </a:prstGeom>
+          <a:noFill/>
+        </p:spPr>
+        <p:txBody>
+          <a:bodyPr wrap="none" rtlCol="0">
+            <a:spAutoFit/>
+          </a:bodyPr>
+          <a:lstStyle/>
+          <a:p>
+            <a:r>
+              <a:rPr kumimoji="1" lang="en-US" altLang="ja-JP" sz="2400" b="1" dirty="0">
+                <a:solidFill>
+                  <a:srgbClr val="00B050"/>
+                </a:solidFill>
+              </a:rPr>
+              <a:t>vector</a:t>
+            </a:r>
+            <a:r>
+              <a:rPr kumimoji="1" lang="ja-JP" altLang="en-US" sz="2400" dirty="0"/>
+              <a:t>や</a:t>
+            </a:r>
+            <a:r>
+              <a:rPr kumimoji="1" lang="en-US" altLang="ja-JP" sz="2400" b="1" dirty="0">
+                <a:solidFill>
+                  <a:srgbClr val="00B050"/>
+                </a:solidFill>
+              </a:rPr>
+              <a:t>list</a:t>
+            </a:r>
+            <a:r>
+              <a:rPr kumimoji="1" lang="ja-JP" altLang="en-US" sz="2400" dirty="0"/>
+              <a:t>は</a:t>
+            </a:r>
+            <a:r>
+              <a:rPr kumimoji="1" lang="ja-JP" altLang="en-US" sz="2400" b="1" dirty="0">
+                <a:solidFill>
+                  <a:srgbClr val="00B050"/>
+                </a:solidFill>
+              </a:rPr>
+              <a:t>クラス</a:t>
+            </a:r>
+            <a:r>
+              <a:rPr kumimoji="1" lang="ja-JP" altLang="en-US" sz="2400" dirty="0"/>
+              <a:t>です。</a:t>
+            </a:r>
+            <a:endParaRPr kumimoji="1" lang="en-US" altLang="ja-JP" sz="2400" dirty="0"/>
+          </a:p>
+          <a:p>
+            <a:r>
+              <a:rPr kumimoji="1" lang="ja-JP" altLang="en-US" sz="2400" dirty="0"/>
+              <a:t>クラスにはメンバ変数のデータ以外にも様々なデータが記録されています。</a:t>
+            </a:r>
+            <a:endParaRPr kumimoji="1" lang="en-US" altLang="ja-JP" sz="2400" dirty="0"/>
+          </a:p>
+          <a:p>
+            <a:r>
+              <a:rPr lang="ja-JP" altLang="en-US" sz="2400" b="1" dirty="0">
+                <a:solidFill>
+                  <a:srgbClr val="FF0000"/>
+                </a:solidFill>
+              </a:rPr>
+              <a:t>データの送受信は純粋なデータのみで行わなければいけない</a:t>
+            </a:r>
+            <a:r>
+              <a:rPr lang="ja-JP" altLang="en-US" sz="2400" dirty="0"/>
+              <a:t>ので、</a:t>
+            </a:r>
+            <a:endParaRPr lang="en-US" altLang="ja-JP" sz="2400" dirty="0"/>
+          </a:p>
+          <a:p>
+            <a:r>
+              <a:rPr kumimoji="1" lang="ja-JP" altLang="en-US" sz="2400" dirty="0"/>
+              <a:t>変換する必要があります。（</a:t>
+            </a:r>
+            <a:r>
+              <a:rPr kumimoji="1" lang="ja-JP" altLang="en-US" sz="2400" b="1" dirty="0">
+                <a:solidFill>
+                  <a:srgbClr val="FF0000"/>
+                </a:solidFill>
+              </a:rPr>
+              <a:t>シリアライズ処理</a:t>
+            </a:r>
+            <a:r>
+              <a:rPr kumimoji="1" lang="ja-JP" altLang="en-US" sz="2400" dirty="0"/>
+              <a:t>）</a:t>
+            </a:r>
+            <a:endParaRPr kumimoji="1" lang="en-US" altLang="ja-JP" sz="2400" dirty="0"/>
+          </a:p>
+        </p:txBody>
+      </p:sp>
+      <p:pic>
+        <p:nvPicPr>
+          <p:cNvPr id="3" name="図 2">
+            <a:extLst>
+              <a:ext uri="{FF2B5EF4-FFF2-40B4-BE49-F238E27FC236}">
+                <a16:creationId xmlns:a16="http://schemas.microsoft.com/office/drawing/2014/main" id="{90FA9E39-335A-401F-A830-66097B4B8F68}"/>
+              </a:ext>
+            </a:extLst>
+          </p:cNvPr>
+          <p:cNvPicPr>
+            <a:picLocks noChangeAspect="1"/>
+          </p:cNvPicPr>
+          <p:nvPr/>
+        </p:nvPicPr>
+        <p:blipFill>
+          <a:blip r:embed="rId2"/>
+          <a:stretch>
+            <a:fillRect/>
+          </a:stretch>
+        </p:blipFill>
+        <p:spPr>
+          <a:xfrm>
+            <a:off x="567542" y="2925789"/>
+            <a:ext cx="9783118" cy="2820587"/>
+          </a:xfrm>
+          <a:prstGeom prst="rect">
+            <a:avLst/>
+          </a:prstGeom>
+        </p:spPr>
+      </p:pic>
+    </p:spTree>
+    <p:extLst>
+      <p:ext uri="{BB962C8B-B14F-4D97-AF65-F5344CB8AC3E}">
+        <p14:creationId xmlns:p14="http://schemas.microsoft.com/office/powerpoint/2010/main" val="4293959987"/>
+      </p:ext>
+    </p:extLst>
+  </p:cSld>
+  <p:clrMapOvr>
+    <a:masterClrMapping/>
+  </p:clrMapOvr>
+</p:sld>
+</file>
+
+<file path=ppt/slides/slide9.xml><?xml version="1.0" encoding="utf-8"?>
+<p:sld xmlns:a="http://schemas.openxmlformats.org/drawingml/2006/main" xmlns:r="http://schemas.openxmlformats.org/officeDocument/2006/relationships" xmlns:p="http://schemas.openxmlformats.org/presentationml/2006/main">
+  <p:cSld>
+    <p:spTree>
+      <p:nvGrpSpPr>
+        <p:cNvPr id="1" name=""/>
+        <p:cNvGrpSpPr/>
+        <p:nvPr/>
+      </p:nvGrpSpPr>
+      <p:grpSpPr>
+        <a:xfrm>
+          <a:off x="0" y="0"/>
+          <a:ext cx="0" cy="0"/>
+          <a:chOff x="0" y="0"/>
+          <a:chExt cx="0" cy="0"/>
+        </a:xfrm>
+      </p:grpSpPr>
+      <p:sp>
+        <p:nvSpPr>
+          <p:cNvPr id="4" name="テキスト ボックス 3">
+            <a:extLst>
+              <a:ext uri="{FF2B5EF4-FFF2-40B4-BE49-F238E27FC236}">
+                <a16:creationId xmlns:a16="http://schemas.microsoft.com/office/drawing/2014/main" id="{5A13BF46-B8C5-48AA-8308-C9ECFF431A18}"/>
+              </a:ext>
+            </a:extLst>
+          </p:cNvPr>
+          <p:cNvSpPr txBox="1"/>
+          <p:nvPr/>
+        </p:nvSpPr>
+        <p:spPr>
+          <a:xfrm>
+            <a:off x="567542" y="491954"/>
+            <a:ext cx="4774064" cy="584775"/>
+          </a:xfrm>
+          <a:prstGeom prst="rect">
+            <a:avLst/>
+          </a:prstGeom>
+          <a:noFill/>
+        </p:spPr>
+        <p:txBody>
+          <a:bodyPr wrap="none" rtlCol="0">
+            <a:spAutoFit/>
+          </a:bodyPr>
+          <a:lstStyle/>
+          <a:p>
+            <a:r>
+              <a:rPr kumimoji="1" lang="ja-JP" altLang="en-US" sz="3200" b="1" u="sng" dirty="0"/>
+              <a:t>チャットプログラム</a:t>
+            </a:r>
+            <a:r>
+              <a:rPr kumimoji="1" lang="en-US" altLang="ja-JP" sz="3200" b="1" u="sng" dirty="0"/>
+              <a:t>(CS)</a:t>
+            </a:r>
+            <a:endParaRPr kumimoji="1" lang="ja-JP" altLang="en-US" sz="3200" b="1" u="sng" dirty="0"/>
+          </a:p>
+        </p:txBody>
+      </p:sp>
+      <p:sp>
+        <p:nvSpPr>
+          <p:cNvPr id="6" name="テキスト ボックス 5">
+            <a:extLst>
+              <a:ext uri="{FF2B5EF4-FFF2-40B4-BE49-F238E27FC236}">
+                <a16:creationId xmlns:a16="http://schemas.microsoft.com/office/drawing/2014/main" id="{55830AD6-028B-4C4E-80BF-B70DFC1C3A46}"/>
+              </a:ext>
+            </a:extLst>
+          </p:cNvPr>
+          <p:cNvSpPr txBox="1"/>
+          <p:nvPr/>
+        </p:nvSpPr>
+        <p:spPr>
+          <a:xfrm>
+            <a:off x="567542" y="1216429"/>
+            <a:ext cx="5379999" cy="461665"/>
+          </a:xfrm>
+          <a:prstGeom prst="rect">
+            <a:avLst/>
+          </a:prstGeom>
+          <a:noFill/>
+        </p:spPr>
+        <p:txBody>
+          <a:bodyPr wrap="none" rtlCol="0">
+            <a:spAutoFit/>
+          </a:bodyPr>
+          <a:lstStyle/>
+          <a:p>
+            <a:r>
+              <a:rPr kumimoji="1" lang="en-US" altLang="ja-JP" sz="2400" b="1" dirty="0">
+                <a:solidFill>
+                  <a:srgbClr val="7030A0"/>
+                </a:solidFill>
+              </a:rPr>
+              <a:t>Client</a:t>
+            </a:r>
+            <a:r>
+              <a:rPr kumimoji="1" lang="ja-JP" altLang="en-US" sz="2400" b="1" dirty="0">
+                <a:solidFill>
+                  <a:srgbClr val="7030A0"/>
+                </a:solidFill>
+              </a:rPr>
+              <a:t>プロジェクト</a:t>
+            </a:r>
+            <a:r>
+              <a:rPr lang="ja-JP" altLang="en-US" sz="2400" dirty="0"/>
+              <a:t>を開きましょう。</a:t>
+            </a:r>
+            <a:endParaRPr kumimoji="1" lang="en-US" altLang="ja-JP" sz="2400" dirty="0"/>
+          </a:p>
+        </p:txBody>
+      </p:sp>
+      <p:pic>
+        <p:nvPicPr>
+          <p:cNvPr id="3" name="図 2">
+            <a:extLst>
+              <a:ext uri="{FF2B5EF4-FFF2-40B4-BE49-F238E27FC236}">
+                <a16:creationId xmlns:a16="http://schemas.microsoft.com/office/drawing/2014/main" id="{2441673F-D354-4BFB-B184-ECFCAD56C1F8}"/>
+              </a:ext>
+            </a:extLst>
+          </p:cNvPr>
+          <p:cNvPicPr>
+            <a:picLocks noChangeAspect="1"/>
+          </p:cNvPicPr>
+          <p:nvPr/>
+        </p:nvPicPr>
+        <p:blipFill>
+          <a:blip r:embed="rId2"/>
+          <a:stretch>
+            <a:fillRect/>
+          </a:stretch>
+        </p:blipFill>
+        <p:spPr>
+          <a:xfrm>
+            <a:off x="567542" y="1817794"/>
+            <a:ext cx="8701964" cy="4677306"/>
+          </a:xfrm>
+          <a:prstGeom prst="rect">
+            <a:avLst/>
+          </a:prstGeom>
+        </p:spPr>
+      </p:pic>
+    </p:spTree>
+    <p:extLst>
+      <p:ext uri="{BB962C8B-B14F-4D97-AF65-F5344CB8AC3E}">
+        <p14:creationId xmlns:p14="http://schemas.microsoft.com/office/powerpoint/2010/main" val="3746535241"/>
       </p:ext>
     </p:extLst>
   </p:cSld>

--- a/ゲーム科3年/00_前期/オンラインゲームプログラミングⅠ/05_チャットプログラム(CS).pptx
+++ b/ゲーム科3年/00_前期/オンラインゲームプログラミングⅠ/05_チャットプログラム(CS).pptx
@@ -16,6 +16,7 @@
     <p:sldId id="265" r:id="rId10"/>
     <p:sldId id="266" r:id="rId11"/>
     <p:sldId id="267" r:id="rId12"/>
+    <p:sldId id="268" r:id="rId13"/>
   </p:sldIdLst>
   <p:sldSz cx="12192000" cy="6858000"/>
   <p:notesSz cx="6858000" cy="9144000"/>
@@ -269,7 +270,7 @@
           <a:p>
             <a:fld id="{E9CC885B-4903-4D54-9A93-00025F12DED9}" type="datetimeFigureOut">
               <a:rPr kumimoji="1" lang="ja-JP" altLang="en-US" smtClean="0"/>
-              <a:t>2025/10/10</a:t>
+              <a:t>2025/11/6</a:t>
             </a:fld>
             <a:endParaRPr kumimoji="1" lang="ja-JP" altLang="en-US"/>
           </a:p>
@@ -499,7 +500,7 @@
           <a:p>
             <a:fld id="{E9CC885B-4903-4D54-9A93-00025F12DED9}" type="datetimeFigureOut">
               <a:rPr kumimoji="1" lang="ja-JP" altLang="en-US" smtClean="0"/>
-              <a:t>2025/10/10</a:t>
+              <a:t>2025/11/6</a:t>
             </a:fld>
             <a:endParaRPr kumimoji="1" lang="ja-JP" altLang="en-US"/>
           </a:p>
@@ -739,7 +740,7 @@
           <a:p>
             <a:fld id="{E9CC885B-4903-4D54-9A93-00025F12DED9}" type="datetimeFigureOut">
               <a:rPr kumimoji="1" lang="ja-JP" altLang="en-US" smtClean="0"/>
-              <a:t>2025/10/10</a:t>
+              <a:t>2025/11/6</a:t>
             </a:fld>
             <a:endParaRPr kumimoji="1" lang="ja-JP" altLang="en-US"/>
           </a:p>
@@ -969,7 +970,7 @@
           <a:p>
             <a:fld id="{E9CC885B-4903-4D54-9A93-00025F12DED9}" type="datetimeFigureOut">
               <a:rPr kumimoji="1" lang="ja-JP" altLang="en-US" smtClean="0"/>
-              <a:t>2025/10/10</a:t>
+              <a:t>2025/11/6</a:t>
             </a:fld>
             <a:endParaRPr kumimoji="1" lang="ja-JP" altLang="en-US"/>
           </a:p>
@@ -1244,7 +1245,7 @@
           <a:p>
             <a:fld id="{E9CC885B-4903-4D54-9A93-00025F12DED9}" type="datetimeFigureOut">
               <a:rPr kumimoji="1" lang="ja-JP" altLang="en-US" smtClean="0"/>
-              <a:t>2025/10/10</a:t>
+              <a:t>2025/11/6</a:t>
             </a:fld>
             <a:endParaRPr kumimoji="1" lang="ja-JP" altLang="en-US"/>
           </a:p>
@@ -1573,7 +1574,7 @@
           <a:p>
             <a:fld id="{E9CC885B-4903-4D54-9A93-00025F12DED9}" type="datetimeFigureOut">
               <a:rPr kumimoji="1" lang="ja-JP" altLang="en-US" smtClean="0"/>
-              <a:t>2025/10/10</a:t>
+              <a:t>2025/11/6</a:t>
             </a:fld>
             <a:endParaRPr kumimoji="1" lang="ja-JP" altLang="en-US"/>
           </a:p>
@@ -2049,7 +2050,7 @@
           <a:p>
             <a:fld id="{E9CC885B-4903-4D54-9A93-00025F12DED9}" type="datetimeFigureOut">
               <a:rPr kumimoji="1" lang="ja-JP" altLang="en-US" smtClean="0"/>
-              <a:t>2025/10/10</a:t>
+              <a:t>2025/11/6</a:t>
             </a:fld>
             <a:endParaRPr kumimoji="1" lang="ja-JP" altLang="en-US"/>
           </a:p>
@@ -2190,7 +2191,7 @@
           <a:p>
             <a:fld id="{E9CC885B-4903-4D54-9A93-00025F12DED9}" type="datetimeFigureOut">
               <a:rPr kumimoji="1" lang="ja-JP" altLang="en-US" smtClean="0"/>
-              <a:t>2025/10/10</a:t>
+              <a:t>2025/11/6</a:t>
             </a:fld>
             <a:endParaRPr kumimoji="1" lang="ja-JP" altLang="en-US"/>
           </a:p>
@@ -2303,7 +2304,7 @@
           <a:p>
             <a:fld id="{E9CC885B-4903-4D54-9A93-00025F12DED9}" type="datetimeFigureOut">
               <a:rPr kumimoji="1" lang="ja-JP" altLang="en-US" smtClean="0"/>
-              <a:t>2025/10/10</a:t>
+              <a:t>2025/11/6</a:t>
             </a:fld>
             <a:endParaRPr kumimoji="1" lang="ja-JP" altLang="en-US"/>
           </a:p>
@@ -2646,7 +2647,7 @@
           <a:p>
             <a:fld id="{E9CC885B-4903-4D54-9A93-00025F12DED9}" type="datetimeFigureOut">
               <a:rPr kumimoji="1" lang="ja-JP" altLang="en-US" smtClean="0"/>
-              <a:t>2025/10/10</a:t>
+              <a:t>2025/11/6</a:t>
             </a:fld>
             <a:endParaRPr kumimoji="1" lang="ja-JP" altLang="en-US"/>
           </a:p>
@@ -2934,7 +2935,7 @@
           <a:p>
             <a:fld id="{E9CC885B-4903-4D54-9A93-00025F12DED9}" type="datetimeFigureOut">
               <a:rPr kumimoji="1" lang="ja-JP" altLang="en-US" smtClean="0"/>
-              <a:t>2025/10/10</a:t>
+              <a:t>2025/11/6</a:t>
             </a:fld>
             <a:endParaRPr kumimoji="1" lang="ja-JP" altLang="en-US"/>
           </a:p>
@@ -3207,7 +3208,7 @@
           <a:p>
             <a:fld id="{E9CC885B-4903-4D54-9A93-00025F12DED9}" type="datetimeFigureOut">
               <a:rPr kumimoji="1" lang="ja-JP" altLang="en-US" smtClean="0"/>
-              <a:t>2025/10/10</a:t>
+              <a:t>2025/11/6</a:t>
             </a:fld>
             <a:endParaRPr kumimoji="1" lang="ja-JP" altLang="en-US"/>
           </a:p>
@@ -4557,6 +4558,136 @@
     <p:extLst>
       <p:ext uri="{BB962C8B-B14F-4D97-AF65-F5344CB8AC3E}">
         <p14:creationId xmlns:p14="http://schemas.microsoft.com/office/powerpoint/2010/main" val="4030790080"/>
+      </p:ext>
+    </p:extLst>
+  </p:cSld>
+  <p:clrMapOvr>
+    <a:masterClrMapping/>
+  </p:clrMapOvr>
+</p:sld>
+</file>
+
+<file path=ppt/slides/slide12.xml><?xml version="1.0" encoding="utf-8"?>
+<p:sld xmlns:a="http://schemas.openxmlformats.org/drawingml/2006/main" xmlns:r="http://schemas.openxmlformats.org/officeDocument/2006/relationships" xmlns:p="http://schemas.openxmlformats.org/presentationml/2006/main">
+  <p:cSld>
+    <p:spTree>
+      <p:nvGrpSpPr>
+        <p:cNvPr id="1" name=""/>
+        <p:cNvGrpSpPr/>
+        <p:nvPr/>
+      </p:nvGrpSpPr>
+      <p:grpSpPr>
+        <a:xfrm>
+          <a:off x="0" y="0"/>
+          <a:ext cx="0" cy="0"/>
+          <a:chOff x="0" y="0"/>
+          <a:chExt cx="0" cy="0"/>
+        </a:xfrm>
+      </p:grpSpPr>
+      <p:sp>
+        <p:nvSpPr>
+          <p:cNvPr id="4" name="テキスト ボックス 3">
+            <a:extLst>
+              <a:ext uri="{FF2B5EF4-FFF2-40B4-BE49-F238E27FC236}">
+                <a16:creationId xmlns:a16="http://schemas.microsoft.com/office/drawing/2014/main" id="{5A13BF46-B8C5-48AA-8308-C9ECFF431A18}"/>
+              </a:ext>
+            </a:extLst>
+          </p:cNvPr>
+          <p:cNvSpPr txBox="1"/>
+          <p:nvPr/>
+        </p:nvSpPr>
+        <p:spPr>
+          <a:xfrm>
+            <a:off x="567542" y="491954"/>
+            <a:ext cx="4774064" cy="584775"/>
+          </a:xfrm>
+          <a:prstGeom prst="rect">
+            <a:avLst/>
+          </a:prstGeom>
+          <a:noFill/>
+        </p:spPr>
+        <p:txBody>
+          <a:bodyPr wrap="none" rtlCol="0">
+            <a:spAutoFit/>
+          </a:bodyPr>
+          <a:lstStyle/>
+          <a:p>
+            <a:r>
+              <a:rPr kumimoji="1" lang="ja-JP" altLang="en-US" sz="3200" b="1" u="sng" dirty="0"/>
+              <a:t>チャットプログラム</a:t>
+            </a:r>
+            <a:r>
+              <a:rPr kumimoji="1" lang="en-US" altLang="ja-JP" sz="3200" b="1" u="sng" dirty="0"/>
+              <a:t>(CS)</a:t>
+            </a:r>
+            <a:endParaRPr kumimoji="1" lang="ja-JP" altLang="en-US" sz="3200" b="1" u="sng" dirty="0"/>
+          </a:p>
+        </p:txBody>
+      </p:sp>
+      <p:sp>
+        <p:nvSpPr>
+          <p:cNvPr id="6" name="テキスト ボックス 5">
+            <a:extLst>
+              <a:ext uri="{FF2B5EF4-FFF2-40B4-BE49-F238E27FC236}">
+                <a16:creationId xmlns:a16="http://schemas.microsoft.com/office/drawing/2014/main" id="{55830AD6-028B-4C4E-80BF-B70DFC1C3A46}"/>
+              </a:ext>
+            </a:extLst>
+          </p:cNvPr>
+          <p:cNvSpPr txBox="1"/>
+          <p:nvPr/>
+        </p:nvSpPr>
+        <p:spPr>
+          <a:xfrm>
+            <a:off x="567542" y="1216429"/>
+            <a:ext cx="7263527" cy="1938992"/>
+          </a:xfrm>
+          <a:prstGeom prst="rect">
+            <a:avLst/>
+          </a:prstGeom>
+          <a:noFill/>
+        </p:spPr>
+        <p:txBody>
+          <a:bodyPr wrap="none" rtlCol="0">
+            <a:spAutoFit/>
+          </a:bodyPr>
+          <a:lstStyle/>
+          <a:p>
+            <a:r>
+              <a:rPr lang="ja-JP" altLang="en-US" sz="2400" dirty="0"/>
+              <a:t>今回のチャットプログラムが、</a:t>
+            </a:r>
+            <a:endParaRPr lang="en-US" altLang="ja-JP" sz="2400" dirty="0"/>
+          </a:p>
+          <a:p>
+            <a:r>
+              <a:rPr kumimoji="1" lang="ja-JP" altLang="en-US" sz="2400" dirty="0"/>
+              <a:t>ネットワークプログラミングの基礎となります。</a:t>
+            </a:r>
+            <a:endParaRPr kumimoji="1" lang="en-US" altLang="ja-JP" sz="2400" dirty="0"/>
+          </a:p>
+          <a:p>
+            <a:r>
+              <a:rPr lang="ja-JP" altLang="en-US" sz="2400" dirty="0"/>
+              <a:t>今回の処理をよく覚えておきましょう。</a:t>
+            </a:r>
+            <a:endParaRPr lang="en-US" altLang="ja-JP" sz="2400" dirty="0"/>
+          </a:p>
+          <a:p>
+            <a:endParaRPr kumimoji="1" lang="en-US" altLang="ja-JP" sz="2400" dirty="0"/>
+          </a:p>
+          <a:p>
+            <a:r>
+              <a:rPr lang="ja-JP" altLang="en-US" sz="2400"/>
+              <a:t>次回から、実際にプレイヤーを動かしていきます。</a:t>
+            </a:r>
+            <a:endParaRPr kumimoji="1" lang="en-US" altLang="ja-JP" sz="2400" dirty="0"/>
+          </a:p>
+        </p:txBody>
+      </p:sp>
+    </p:spTree>
+    <p:extLst>
+      <p:ext uri="{BB962C8B-B14F-4D97-AF65-F5344CB8AC3E}">
+        <p14:creationId xmlns:p14="http://schemas.microsoft.com/office/powerpoint/2010/main" val="2749313203"/>
       </p:ext>
     </p:extLst>
   </p:cSld>
